--- a/presentation/Case_Study_2_Final_Presentation.pptx
+++ b/presentation/Case_Study_2_Final_Presentation.pptx
@@ -117,6 +117,2079 @@
     </a:lvl9pPr>
   </p:defaultTextStyle>
 </p:presentation>
+</file>
+
+<file path=ppt/notesMasters/notesMaster1.xml><?xml version="1.0" encoding="utf-8"?>
+<p:notesMaster xmlns:a="http://schemas.openxmlformats.org/drawingml/2006/main" xmlns:p="http://schemas.openxmlformats.org/presentationml/2006/main" xmlns:r="http://schemas.openxmlformats.org/officeDocument/2006/relationships">
+  <p:cSld>
+    <p:bg>
+      <p:bgRef idx="1001">
+        <a:schemeClr val="bg1"/>
+      </p:bgRef>
+    </p:bg>
+    <p:spTree>
+      <p:nvGrpSpPr>
+        <p:cNvPr id="1" name=""/>
+        <p:cNvGrpSpPr/>
+        <p:nvPr/>
+      </p:nvGrpSpPr>
+      <p:grpSpPr>
+        <a:xfrm>
+          <a:off x="0" y="0"/>
+          <a:ext cx="0" cy="0"/>
+          <a:chOff x="0" y="0"/>
+          <a:chExt cx="0" cy="0"/>
+        </a:xfrm>
+      </p:grpSpPr>
+      <p:sp>
+        <p:nvSpPr>
+          <p:cNvPr id="2" name="Header Placeholder 1"/>
+          <p:cNvSpPr>
+            <a:spLocks noGrp="1"/>
+          </p:cNvSpPr>
+          <p:nvPr>
+            <p:ph type="hdr" sz="quarter"/>
+          </p:nvPr>
+        </p:nvSpPr>
+        <p:spPr>
+          <a:xfrm>
+            <a:off x="0" y="0"/>
+            <a:ext cx="2971800" cy="457200"/>
+          </a:xfrm>
+          <a:prstGeom prst="rect">
+            <a:avLst/>
+          </a:prstGeom>
+        </p:spPr>
+        <p:txBody>
+          <a:bodyPr vert="horz" lIns="91440" tIns="45720" rIns="91440" bIns="45720" rtlCol="0"/>
+          <a:lstStyle>
+            <a:lvl1pPr algn="l">
+              <a:defRPr sz="1200"/>
+            </a:lvl1pPr>
+          </a:lstStyle>
+          <a:p>
+            <a:endParaRPr lang="en-US"/>
+          </a:p>
+        </p:txBody>
+      </p:sp>
+      <p:sp>
+        <p:nvSpPr>
+          <p:cNvPr id="3" name="Date Placeholder 2"/>
+          <p:cNvSpPr>
+            <a:spLocks noGrp="1"/>
+          </p:cNvSpPr>
+          <p:nvPr>
+            <p:ph type="dt" idx="1"/>
+          </p:nvPr>
+        </p:nvSpPr>
+        <p:spPr>
+          <a:xfrm>
+            <a:off x="3884613" y="0"/>
+            <a:ext cx="2971800" cy="457200"/>
+          </a:xfrm>
+          <a:prstGeom prst="rect">
+            <a:avLst/>
+          </a:prstGeom>
+        </p:spPr>
+        <p:txBody>
+          <a:bodyPr vert="horz" lIns="91440" tIns="45720" rIns="91440" bIns="45720" rtlCol="0"/>
+          <a:lstStyle>
+            <a:lvl1pPr algn="r">
+              <a:defRPr sz="1200"/>
+            </a:lvl1pPr>
+          </a:lstStyle>
+          <a:p>
+            <a:fld id="{0F89C1C7-3DCD-1040-A9CF-14679D8B5DDD}" type="datetimeFigureOut">
+              <a:rPr lang="en-US" smtClean="0"/>
+              <a:t>10/17/16</a:t>
+            </a:fld>
+            <a:endParaRPr lang="en-US"/>
+          </a:p>
+        </p:txBody>
+      </p:sp>
+      <p:sp>
+        <p:nvSpPr>
+          <p:cNvPr id="4" name="Slide Image Placeholder 3"/>
+          <p:cNvSpPr>
+            <a:spLocks noGrp="1" noRot="1" noChangeAspect="1"/>
+          </p:cNvSpPr>
+          <p:nvPr>
+            <p:ph type="sldImg" idx="2"/>
+          </p:nvPr>
+        </p:nvSpPr>
+        <p:spPr>
+          <a:xfrm>
+            <a:off x="1143000" y="685800"/>
+            <a:ext cx="4572000" cy="3429000"/>
+          </a:xfrm>
+          <a:prstGeom prst="rect">
+            <a:avLst/>
+          </a:prstGeom>
+          <a:noFill/>
+          <a:ln w="12700">
+            <a:solidFill>
+              <a:prstClr val="black"/>
+            </a:solidFill>
+          </a:ln>
+        </p:spPr>
+        <p:txBody>
+          <a:bodyPr vert="horz" lIns="91440" tIns="45720" rIns="91440" bIns="45720" rtlCol="0" anchor="ctr"/>
+          <a:lstStyle/>
+          <a:p>
+            <a:endParaRPr lang="en-US"/>
+          </a:p>
+        </p:txBody>
+      </p:sp>
+      <p:sp>
+        <p:nvSpPr>
+          <p:cNvPr id="5" name="Notes Placeholder 4"/>
+          <p:cNvSpPr>
+            <a:spLocks noGrp="1"/>
+          </p:cNvSpPr>
+          <p:nvPr>
+            <p:ph type="body" sz="quarter" idx="3"/>
+          </p:nvPr>
+        </p:nvSpPr>
+        <p:spPr>
+          <a:xfrm>
+            <a:off x="685800" y="4343400"/>
+            <a:ext cx="5486400" cy="4114800"/>
+          </a:xfrm>
+          <a:prstGeom prst="rect">
+            <a:avLst/>
+          </a:prstGeom>
+        </p:spPr>
+        <p:txBody>
+          <a:bodyPr vert="horz" lIns="91440" tIns="45720" rIns="91440" bIns="45720" rtlCol="0"/>
+          <a:lstStyle/>
+          <a:p>
+            <a:pPr lvl="0"/>
+            <a:r>
+              <a:rPr lang="en-US" smtClean="0"/>
+              <a:t>Click to edit Master text styles</a:t>
+            </a:r>
+          </a:p>
+          <a:p>
+            <a:pPr lvl="1"/>
+            <a:r>
+              <a:rPr lang="en-US" smtClean="0"/>
+              <a:t>Second level</a:t>
+            </a:r>
+          </a:p>
+          <a:p>
+            <a:pPr lvl="2"/>
+            <a:r>
+              <a:rPr lang="en-US" smtClean="0"/>
+              <a:t>Third level</a:t>
+            </a:r>
+          </a:p>
+          <a:p>
+            <a:pPr lvl="3"/>
+            <a:r>
+              <a:rPr lang="en-US" smtClean="0"/>
+              <a:t>Fourth level</a:t>
+            </a:r>
+          </a:p>
+          <a:p>
+            <a:pPr lvl="4"/>
+            <a:r>
+              <a:rPr lang="en-US" smtClean="0"/>
+              <a:t>Fifth level</a:t>
+            </a:r>
+            <a:endParaRPr lang="en-US"/>
+          </a:p>
+        </p:txBody>
+      </p:sp>
+      <p:sp>
+        <p:nvSpPr>
+          <p:cNvPr id="6" name="Footer Placeholder 5"/>
+          <p:cNvSpPr>
+            <a:spLocks noGrp="1"/>
+          </p:cNvSpPr>
+          <p:nvPr>
+            <p:ph type="ftr" sz="quarter" idx="4"/>
+          </p:nvPr>
+        </p:nvSpPr>
+        <p:spPr>
+          <a:xfrm>
+            <a:off x="0" y="8685213"/>
+            <a:ext cx="2971800" cy="457200"/>
+          </a:xfrm>
+          <a:prstGeom prst="rect">
+            <a:avLst/>
+          </a:prstGeom>
+        </p:spPr>
+        <p:txBody>
+          <a:bodyPr vert="horz" lIns="91440" tIns="45720" rIns="91440" bIns="45720" rtlCol="0" anchor="b"/>
+          <a:lstStyle>
+            <a:lvl1pPr algn="l">
+              <a:defRPr sz="1200"/>
+            </a:lvl1pPr>
+          </a:lstStyle>
+          <a:p>
+            <a:endParaRPr lang="en-US"/>
+          </a:p>
+        </p:txBody>
+      </p:sp>
+      <p:sp>
+        <p:nvSpPr>
+          <p:cNvPr id="7" name="Slide Number Placeholder 6"/>
+          <p:cNvSpPr>
+            <a:spLocks noGrp="1"/>
+          </p:cNvSpPr>
+          <p:nvPr>
+            <p:ph type="sldNum" sz="quarter" idx="5"/>
+          </p:nvPr>
+        </p:nvSpPr>
+        <p:spPr>
+          <a:xfrm>
+            <a:off x="3884613" y="8685213"/>
+            <a:ext cx="2971800" cy="457200"/>
+          </a:xfrm>
+          <a:prstGeom prst="rect">
+            <a:avLst/>
+          </a:prstGeom>
+        </p:spPr>
+        <p:txBody>
+          <a:bodyPr vert="horz" lIns="91440" tIns="45720" rIns="91440" bIns="45720" rtlCol="0" anchor="b"/>
+          <a:lstStyle>
+            <a:lvl1pPr algn="r">
+              <a:defRPr sz="1200"/>
+            </a:lvl1pPr>
+          </a:lstStyle>
+          <a:p>
+            <a:fld id="{BB5E49A5-4136-284D-997B-48E1D791AD67}" type="slidenum">
+              <a:rPr lang="en-US" smtClean="0"/>
+              <a:t>‹#›</a:t>
+            </a:fld>
+            <a:endParaRPr lang="en-US"/>
+          </a:p>
+        </p:txBody>
+      </p:sp>
+    </p:spTree>
+    <p:extLst>
+      <p:ext uri="{BB962C8B-B14F-4D97-AF65-F5344CB8AC3E}">
+        <p14:creationId xmlns:p14="http://schemas.microsoft.com/office/powerpoint/2010/main" val="2623252185"/>
+      </p:ext>
+    </p:extLst>
+  </p:cSld>
+  <p:clrMap bg1="lt1" tx1="dk1" bg2="lt2" tx2="dk2" accent1="accent1" accent2="accent2" accent3="accent3" accent4="accent4" accent5="accent5" accent6="accent6" hlink="hlink" folHlink="folHlink"/>
+  <p:notesStyle>
+    <a:lvl1pPr marL="0" algn="l" defTabSz="457200" rtl="0" eaLnBrk="1" latinLnBrk="0" hangingPunct="1">
+      <a:defRPr sz="1200" kern="1200">
+        <a:solidFill>
+          <a:schemeClr val="tx1"/>
+        </a:solidFill>
+        <a:latin typeface="+mn-lt"/>
+        <a:ea typeface="+mn-ea"/>
+        <a:cs typeface="+mn-cs"/>
+      </a:defRPr>
+    </a:lvl1pPr>
+    <a:lvl2pPr marL="457200" algn="l" defTabSz="457200" rtl="0" eaLnBrk="1" latinLnBrk="0" hangingPunct="1">
+      <a:defRPr sz="1200" kern="1200">
+        <a:solidFill>
+          <a:schemeClr val="tx1"/>
+        </a:solidFill>
+        <a:latin typeface="+mn-lt"/>
+        <a:ea typeface="+mn-ea"/>
+        <a:cs typeface="+mn-cs"/>
+      </a:defRPr>
+    </a:lvl2pPr>
+    <a:lvl3pPr marL="914400" algn="l" defTabSz="457200" rtl="0" eaLnBrk="1" latinLnBrk="0" hangingPunct="1">
+      <a:defRPr sz="1200" kern="1200">
+        <a:solidFill>
+          <a:schemeClr val="tx1"/>
+        </a:solidFill>
+        <a:latin typeface="+mn-lt"/>
+        <a:ea typeface="+mn-ea"/>
+        <a:cs typeface="+mn-cs"/>
+      </a:defRPr>
+    </a:lvl3pPr>
+    <a:lvl4pPr marL="1371600" algn="l" defTabSz="457200" rtl="0" eaLnBrk="1" latinLnBrk="0" hangingPunct="1">
+      <a:defRPr sz="1200" kern="1200">
+        <a:solidFill>
+          <a:schemeClr val="tx1"/>
+        </a:solidFill>
+        <a:latin typeface="+mn-lt"/>
+        <a:ea typeface="+mn-ea"/>
+        <a:cs typeface="+mn-cs"/>
+      </a:defRPr>
+    </a:lvl4pPr>
+    <a:lvl5pPr marL="1828800" algn="l" defTabSz="457200" rtl="0" eaLnBrk="1" latinLnBrk="0" hangingPunct="1">
+      <a:defRPr sz="1200" kern="1200">
+        <a:solidFill>
+          <a:schemeClr val="tx1"/>
+        </a:solidFill>
+        <a:latin typeface="+mn-lt"/>
+        <a:ea typeface="+mn-ea"/>
+        <a:cs typeface="+mn-cs"/>
+      </a:defRPr>
+    </a:lvl5pPr>
+    <a:lvl6pPr marL="2286000" algn="l" defTabSz="457200" rtl="0" eaLnBrk="1" latinLnBrk="0" hangingPunct="1">
+      <a:defRPr sz="1200" kern="1200">
+        <a:solidFill>
+          <a:schemeClr val="tx1"/>
+        </a:solidFill>
+        <a:latin typeface="+mn-lt"/>
+        <a:ea typeface="+mn-ea"/>
+        <a:cs typeface="+mn-cs"/>
+      </a:defRPr>
+    </a:lvl6pPr>
+    <a:lvl7pPr marL="2743200" algn="l" defTabSz="457200" rtl="0" eaLnBrk="1" latinLnBrk="0" hangingPunct="1">
+      <a:defRPr sz="1200" kern="1200">
+        <a:solidFill>
+          <a:schemeClr val="tx1"/>
+        </a:solidFill>
+        <a:latin typeface="+mn-lt"/>
+        <a:ea typeface="+mn-ea"/>
+        <a:cs typeface="+mn-cs"/>
+      </a:defRPr>
+    </a:lvl7pPr>
+    <a:lvl8pPr marL="3200400" algn="l" defTabSz="457200" rtl="0" eaLnBrk="1" latinLnBrk="0" hangingPunct="1">
+      <a:defRPr sz="1200" kern="1200">
+        <a:solidFill>
+          <a:schemeClr val="tx1"/>
+        </a:solidFill>
+        <a:latin typeface="+mn-lt"/>
+        <a:ea typeface="+mn-ea"/>
+        <a:cs typeface="+mn-cs"/>
+      </a:defRPr>
+    </a:lvl8pPr>
+    <a:lvl9pPr marL="3657600" algn="l" defTabSz="457200" rtl="0" eaLnBrk="1" latinLnBrk="0" hangingPunct="1">
+      <a:defRPr sz="1200" kern="1200">
+        <a:solidFill>
+          <a:schemeClr val="tx1"/>
+        </a:solidFill>
+        <a:latin typeface="+mn-lt"/>
+        <a:ea typeface="+mn-ea"/>
+        <a:cs typeface="+mn-cs"/>
+      </a:defRPr>
+    </a:lvl9pPr>
+  </p:notesStyle>
+</p:notesMaster>
+</file>
+
+<file path=ppt/notesSlides/notesSlide1.xml><?xml version="1.0" encoding="utf-8"?>
+<p:notes xmlns:a="http://schemas.openxmlformats.org/drawingml/2006/main" xmlns:p="http://schemas.openxmlformats.org/presentationml/2006/main" xmlns:r="http://schemas.openxmlformats.org/officeDocument/2006/relationships">
+  <p:cSld>
+    <p:spTree>
+      <p:nvGrpSpPr>
+        <p:cNvPr id="1" name=""/>
+        <p:cNvGrpSpPr/>
+        <p:nvPr/>
+      </p:nvGrpSpPr>
+      <p:grpSpPr>
+        <a:xfrm>
+          <a:off x="0" y="0"/>
+          <a:ext cx="0" cy="0"/>
+          <a:chOff x="0" y="0"/>
+          <a:chExt cx="0" cy="0"/>
+        </a:xfrm>
+      </p:grpSpPr>
+      <p:sp>
+        <p:nvSpPr>
+          <p:cNvPr id="2" name="Slide Image Placeholder 1"/>
+          <p:cNvSpPr>
+            <a:spLocks noGrp="1"/>
+          </p:cNvSpPr>
+          <p:nvPr>
+            <p:ph type="sldImg" idx="2"/>
+          </p:nvPr>
+        </p:nvSpPr>
+        <p:spPr/>
+      </p:sp>
+      <p:sp>
+        <p:nvSpPr>
+          <p:cNvPr id="3" name="Notes Placeholder 2"/>
+          <p:cNvSpPr>
+            <a:spLocks noGrp="1"/>
+          </p:cNvSpPr>
+          <p:nvPr>
+            <p:ph type="body" idx="3" sz="quarter"/>
+          </p:nvPr>
+        </p:nvSpPr>
+        <p:spPr/>
+        <p:txBody>
+          <a:bodyPr/>
+          <a:lstStyle/>
+          <a:p>
+            <a:r>
+              <a:t>Time: 0:30</a:t>
+            </a:r>
+          </a:p>
+          <a:p>
+            <a:r>
+              <a:t>Remember: I measured how accurately language models read chemistry papers, and what it costs.</a:t>
+            </a:r>
+          </a:p>
+          <a:p/>
+          <a:p>
+            <a:r>
+              <a:t>Good morning. My name is Devendra Singh Dhakad, and this is my Case Study 2, supervised by</a:t>
+            </a:r>
+          </a:p>
+          <a:p>
+            <a:r>
+              <a:t>Professor Jalali.</a:t>
+            </a:r>
+          </a:p>
+          <a:p/>
+          <a:p>
+            <a:r>
+              <a:t>The title is Building and Validating a Metal–Organic Framework Synthesis Knowledge Graph with</a:t>
+            </a:r>
+          </a:p>
+          <a:p>
+            <a:r>
+              <a:t>Large Language Models.</a:t>
+            </a:r>
+          </a:p>
+          <a:p/>
+          <a:p>
+            <a:r>
+              <a:t>In one sentence: I measured how accurately AI language models can read chemistry papers and pull</a:t>
+            </a:r>
+          </a:p>
+          <a:p>
+            <a:r>
+              <a:t>out how a material was made, and what that accuracy costs.</a:t>
+            </a:r>
+          </a:p>
+        </p:txBody>
+      </p:sp>
+      <p:sp>
+        <p:nvSpPr>
+          <p:cNvPr id="4" name="Slide Number Placeholder 3"/>
+          <p:cNvSpPr>
+            <a:spLocks noGrp="1"/>
+          </p:cNvSpPr>
+          <p:nvPr>
+            <p:ph type="sldNum" idx="5" sz="quarter"/>
+          </p:nvPr>
+        </p:nvSpPr>
+        <p:spPr/>
+      </p:sp>
+    </p:spTree>
+  </p:cSld>
+  <p:clrMapOvr>
+    <a:masterClrMapping/>
+  </p:clrMapOvr>
+</p:notes>
+</file>
+
+<file path=ppt/notesSlides/notesSlide10.xml><?xml version="1.0" encoding="utf-8"?>
+<p:notes xmlns:a="http://schemas.openxmlformats.org/drawingml/2006/main" xmlns:p="http://schemas.openxmlformats.org/presentationml/2006/main" xmlns:r="http://schemas.openxmlformats.org/officeDocument/2006/relationships">
+  <p:cSld>
+    <p:spTree>
+      <p:nvGrpSpPr>
+        <p:cNvPr id="1" name=""/>
+        <p:cNvGrpSpPr/>
+        <p:nvPr/>
+      </p:nvGrpSpPr>
+      <p:grpSpPr>
+        <a:xfrm>
+          <a:off x="0" y="0"/>
+          <a:ext cx="0" cy="0"/>
+          <a:chOff x="0" y="0"/>
+          <a:chExt cx="0" cy="0"/>
+        </a:xfrm>
+      </p:grpSpPr>
+      <p:sp>
+        <p:nvSpPr>
+          <p:cNvPr id="2" name="Slide Image Placeholder 1"/>
+          <p:cNvSpPr>
+            <a:spLocks noGrp="1"/>
+          </p:cNvSpPr>
+          <p:nvPr>
+            <p:ph type="sldImg" idx="2"/>
+          </p:nvPr>
+        </p:nvSpPr>
+        <p:spPr/>
+      </p:sp>
+      <p:sp>
+        <p:nvSpPr>
+          <p:cNvPr id="3" name="Notes Placeholder 2"/>
+          <p:cNvSpPr>
+            <a:spLocks noGrp="1"/>
+          </p:cNvSpPr>
+          <p:nvPr>
+            <p:ph type="body" idx="3" sz="quarter"/>
+          </p:nvPr>
+        </p:nvSpPr>
+        <p:spPr/>
+        <p:txBody>
+          <a:bodyPr/>
+          <a:lstStyle/>
+          <a:p>
+            <a:r>
+              <a:t>Time: 1:15</a:t>
+            </a:r>
+          </a:p>
+          <a:p>
+            <a:r>
+              <a:t>Remember: It is not a dictionary problem, it is a linking problem.</a:t>
+            </a:r>
+          </a:p>
+          <a:p/>
+          <a:p>
+            <a:r>
+              <a:t>So why does the rule baseline do so badly?</a:t>
+            </a:r>
+          </a:p>
+          <a:p/>
+          <a:p>
+            <a:r>
+              <a:t>[point to the chart] It identifies which MOF a passage is about in only 121 of 794 passages,</a:t>
+            </a:r>
+          </a:p>
+          <a:p>
+            <a:r>
+              <a:t>about 15 percent. And five of the eight relations have the MOF as their subject, so when the MOF</a:t>
+            </a:r>
+          </a:p>
+          <a:p>
+            <a:r>
+              <a:t>is missing, most of the recipe cannot be extracted at all.</a:t>
+            </a:r>
+          </a:p>
+          <a:p/>
+          <a:p>
+            <a:r>
+              <a:t>The interesting part is why. In 331 passages, the MOF is named somewhere else in the paper. In</a:t>
+            </a:r>
+          </a:p>
+          <a:p>
+            <a:r>
+              <a:t>251, it is called something like "compound 1", which is defined in a table. Neither of those is</a:t>
+            </a:r>
+          </a:p>
+          <a:p>
+            <a:r>
+              <a:t>a missing word in a dictionary.</a:t>
+            </a:r>
+          </a:p>
+          <a:p/>
+          <a:p>
+            <a:r>
+              <a:t>So for anyone maintaining a rule-based system, the fix is linking across the paper and reading</a:t>
+            </a:r>
+          </a:p>
+          <a:p>
+            <a:r>
+              <a:t>tables, not a bigger dictionary.</a:t>
+            </a:r>
+          </a:p>
+        </p:txBody>
+      </p:sp>
+      <p:sp>
+        <p:nvSpPr>
+          <p:cNvPr id="4" name="Slide Number Placeholder 3"/>
+          <p:cNvSpPr>
+            <a:spLocks noGrp="1"/>
+          </p:cNvSpPr>
+          <p:nvPr>
+            <p:ph type="sldNum" idx="5" sz="quarter"/>
+          </p:nvPr>
+        </p:nvSpPr>
+        <p:spPr/>
+      </p:sp>
+    </p:spTree>
+  </p:cSld>
+  <p:clrMapOvr>
+    <a:masterClrMapping/>
+  </p:clrMapOvr>
+</p:notes>
+</file>
+
+<file path=ppt/notesSlides/notesSlide11.xml><?xml version="1.0" encoding="utf-8"?>
+<p:notes xmlns:a="http://schemas.openxmlformats.org/drawingml/2006/main" xmlns:p="http://schemas.openxmlformats.org/presentationml/2006/main" xmlns:r="http://schemas.openxmlformats.org/officeDocument/2006/relationships">
+  <p:cSld>
+    <p:spTree>
+      <p:nvGrpSpPr>
+        <p:cNvPr id="1" name=""/>
+        <p:cNvGrpSpPr/>
+        <p:nvPr/>
+      </p:nvGrpSpPr>
+      <p:grpSpPr>
+        <a:xfrm>
+          <a:off x="0" y="0"/>
+          <a:ext cx="0" cy="0"/>
+          <a:chOff x="0" y="0"/>
+          <a:chExt cx="0" cy="0"/>
+        </a:xfrm>
+      </p:grpSpPr>
+      <p:sp>
+        <p:nvSpPr>
+          <p:cNvPr id="2" name="Slide Image Placeholder 1"/>
+          <p:cNvSpPr>
+            <a:spLocks noGrp="1"/>
+          </p:cNvSpPr>
+          <p:nvPr>
+            <p:ph type="sldImg" idx="2"/>
+          </p:nvPr>
+        </p:nvSpPr>
+        <p:spPr/>
+      </p:sp>
+      <p:sp>
+        <p:nvSpPr>
+          <p:cNvPr id="3" name="Notes Placeholder 2"/>
+          <p:cNvSpPr>
+            <a:spLocks noGrp="1"/>
+          </p:cNvSpPr>
+          <p:nvPr>
+            <p:ph type="body" idx="3" sz="quarter"/>
+          </p:nvPr>
+        </p:nvSpPr>
+        <p:spPr/>
+        <p:txBody>
+          <a:bodyPr/>
+          <a:lstStyle/>
+          <a:p>
+            <a:r>
+              <a:t>Time: 1:00 *(can shorten)*</a:t>
+            </a:r>
+          </a:p>
+          <a:p>
+            <a:r>
+              <a:t>Remember: Every fact traces back to its paper, and I checked that with a query.</a:t>
+            </a:r>
+          </a:p>
+          <a:p/>
+          <a:p>
+            <a:r>
+              <a:t>RQ5, the knowledge graph. Built from the rule-based extractions over all 794 passages, it has</a:t>
+            </a:r>
+          </a:p>
+          <a:p>
+            <a:r>
+              <a:t>485 distinct nodes and 2,429 relationships, across 182 papers.</a:t>
+            </a:r>
+          </a:p>
+          <a:p/>
+          <a:p>
+            <a:r>
+              <a:t>Every entity has a MENTIONED_IN edge back to its source paper. I verify that with a query that</a:t>
+            </a:r>
+          </a:p>
+          <a:p>
+            <a:r>
+              <a:t>looks for any entity without one, and it returns zero rows. So provenance is checked, not just</a:t>
+            </a:r>
+          </a:p>
+          <a:p>
+            <a:r>
+              <a:t>claimed.</a:t>
+            </a:r>
+          </a:p>
+          <a:p/>
+          <a:p>
+            <a:r>
+              <a:t>The graph can answer questions across papers. For example, solvothermal synthesis appears in 61</a:t>
+            </a:r>
+          </a:p>
+          <a:p>
+            <a:r>
+              <a:t>papers, covering 30 MOFs.</a:t>
+            </a:r>
+          </a:p>
+          <a:p/>
+          <a:p>
+            <a:r>
+              <a:t>[point to the box] One open question. DigiMOF found more hydrothermal than solvothermal records,</a:t>
+            </a:r>
+          </a:p>
+          <a:p>
+            <a:r>
+              <a:t>and called that surprising. My corpus shows the opposite. I record that; I do not claim to</a:t>
+            </a:r>
+          </a:p>
+          <a:p>
+            <a:r>
+              <a:t>explain it.</a:t>
+            </a:r>
+          </a:p>
+        </p:txBody>
+      </p:sp>
+      <p:sp>
+        <p:nvSpPr>
+          <p:cNvPr id="4" name="Slide Number Placeholder 3"/>
+          <p:cNvSpPr>
+            <a:spLocks noGrp="1"/>
+          </p:cNvSpPr>
+          <p:nvPr>
+            <p:ph type="sldNum" idx="5" sz="quarter"/>
+          </p:nvPr>
+        </p:nvSpPr>
+        <p:spPr/>
+      </p:sp>
+    </p:spTree>
+  </p:cSld>
+  <p:clrMapOvr>
+    <a:masterClrMapping/>
+  </p:clrMapOvr>
+</p:notes>
+</file>
+
+<file path=ppt/notesSlides/notesSlide12.xml><?xml version="1.0" encoding="utf-8"?>
+<p:notes xmlns:a="http://schemas.openxmlformats.org/drawingml/2006/main" xmlns:p="http://schemas.openxmlformats.org/presentationml/2006/main" xmlns:r="http://schemas.openxmlformats.org/officeDocument/2006/relationships">
+  <p:cSld>
+    <p:spTree>
+      <p:nvGrpSpPr>
+        <p:cNvPr id="1" name=""/>
+        <p:cNvGrpSpPr/>
+        <p:nvPr/>
+      </p:nvGrpSpPr>
+      <p:grpSpPr>
+        <a:xfrm>
+          <a:off x="0" y="0"/>
+          <a:ext cx="0" cy="0"/>
+          <a:chOff x="0" y="0"/>
+          <a:chExt cx="0" cy="0"/>
+        </a:xfrm>
+      </p:grpSpPr>
+      <p:sp>
+        <p:nvSpPr>
+          <p:cNvPr id="2" name="Slide Image Placeholder 1"/>
+          <p:cNvSpPr>
+            <a:spLocks noGrp="1"/>
+          </p:cNvSpPr>
+          <p:nvPr>
+            <p:ph type="sldImg" idx="2"/>
+          </p:nvPr>
+        </p:nvSpPr>
+        <p:spPr/>
+      </p:sp>
+      <p:sp>
+        <p:nvSpPr>
+          <p:cNvPr id="3" name="Notes Placeholder 2"/>
+          <p:cNvSpPr>
+            <a:spLocks noGrp="1"/>
+          </p:cNvSpPr>
+          <p:nvPr>
+            <p:ph type="body" idx="3" sz="quarter"/>
+          </p:nvPr>
+        </p:nvSpPr>
+        <p:spPr/>
+        <p:txBody>
+          <a:bodyPr/>
+          <a:lstStyle/>
+          <a:p>
+            <a:r>
+              <a:t>Time: 1:30</a:t>
+            </a:r>
+          </a:p>
+          <a:p>
+            <a:r>
+              <a:t>Remember: Undetermined is not the same as zero.</a:t>
+            </a:r>
+          </a:p>
+          <a:p/>
+          <a:p>
+            <a:r>
+              <a:t>This slide is what the study cannot show, and I want to be direct about it.</a:t>
+            </a:r>
+          </a:p>
+          <a:p/>
+          <a:p>
+            <a:r>
+              <a:t>RQ3 is not answered. DigiMOF and SynMOF identify each material by a CSD refcode. My corpus uses</a:t>
+            </a:r>
+          </a:p>
+          <a:p>
+            <a:r>
+              <a:t>DOIs and the names written in the papers. Joining the two needs a licensed mapping that I did not</a:t>
+            </a:r>
+          </a:p>
+          <a:p>
+            <a:r>
+              <a:t>have. So the overlap is undetermined, and that is not the same as zero. What I could measure is</a:t>
+            </a:r>
+          </a:p>
+          <a:p>
+            <a:r>
+              <a:t>that the two databases agree with each other on the metal 98.9 percent of the time, across the</a:t>
+            </a:r>
+          </a:p>
+          <a:p>
+            <a:r>
+              <a:t>509 MOFs they share.</a:t>
+            </a:r>
+          </a:p>
+          <a:p/>
+          <a:p>
+            <a:r>
+              <a:t>The best F1, 0.364, is below the 0.80 I targeted in the exposé. Part of that is strict text</a:t>
+            </a:r>
+          </a:p>
+          <a:p>
+            <a:r>
+              <a:t>matching: a correct answer written differently counts as wrong. So 0.364 is a lower bound.</a:t>
+            </a:r>
+          </a:p>
+          <a:p/>
+          <a:p>
+            <a:r>
+              <a:t>The gold standard is 100 passages with one annotator, so I cannot compute agreement between</a:t>
+            </a:r>
+          </a:p>
+          <a:p>
+            <a:r>
+              <a:t>annotators.</a:t>
+            </a:r>
+          </a:p>
+          <a:p/>
+          <a:p>
+            <a:r>
+              <a:t>Two open-weight runs hit a daily free-tier limit, and I deleted them rather than score them,</a:t>
+            </a:r>
+          </a:p>
+          <a:p>
+            <a:r>
+              <a:t>because a half-finished run makes a rate-limited model look like a bad model.</a:t>
+            </a:r>
+          </a:p>
+          <a:p/>
+          <a:p>
+            <a:r>
+              <a:t>And every configuration ran once, so there is no estimate of variance.</a:t>
+            </a:r>
+          </a:p>
+        </p:txBody>
+      </p:sp>
+      <p:sp>
+        <p:nvSpPr>
+          <p:cNvPr id="4" name="Slide Number Placeholder 3"/>
+          <p:cNvSpPr>
+            <a:spLocks noGrp="1"/>
+          </p:cNvSpPr>
+          <p:nvPr>
+            <p:ph type="sldNum" idx="5" sz="quarter"/>
+          </p:nvPr>
+        </p:nvSpPr>
+        <p:spPr/>
+      </p:sp>
+    </p:spTree>
+  </p:cSld>
+  <p:clrMapOvr>
+    <a:masterClrMapping/>
+  </p:clrMapOvr>
+</p:notes>
+</file>
+
+<file path=ppt/notesSlides/notesSlide13.xml><?xml version="1.0" encoding="utf-8"?>
+<p:notes xmlns:a="http://schemas.openxmlformats.org/drawingml/2006/main" xmlns:p="http://schemas.openxmlformats.org/presentationml/2006/main" xmlns:r="http://schemas.openxmlformats.org/officeDocument/2006/relationships">
+  <p:cSld>
+    <p:spTree>
+      <p:nvGrpSpPr>
+        <p:cNvPr id="1" name=""/>
+        <p:cNvGrpSpPr/>
+        <p:nvPr/>
+      </p:nvGrpSpPr>
+      <p:grpSpPr>
+        <a:xfrm>
+          <a:off x="0" y="0"/>
+          <a:ext cx="0" cy="0"/>
+          <a:chOff x="0" y="0"/>
+          <a:chExt cx="0" cy="0"/>
+        </a:xfrm>
+      </p:grpSpPr>
+      <p:sp>
+        <p:nvSpPr>
+          <p:cNvPr id="2" name="Slide Image Placeholder 1"/>
+          <p:cNvSpPr>
+            <a:spLocks noGrp="1"/>
+          </p:cNvSpPr>
+          <p:nvPr>
+            <p:ph type="sldImg" idx="2"/>
+          </p:nvPr>
+        </p:nvSpPr>
+        <p:spPr/>
+      </p:sp>
+      <p:sp>
+        <p:nvSpPr>
+          <p:cNvPr id="3" name="Notes Placeholder 2"/>
+          <p:cNvSpPr>
+            <a:spLocks noGrp="1"/>
+          </p:cNvSpPr>
+          <p:nvPr>
+            <p:ph type="body" idx="3" sz="quarter"/>
+          </p:nvPr>
+        </p:nvSpPr>
+        <p:spPr/>
+        <p:txBody>
+          <a:bodyPr/>
+          <a:lstStyle/>
+          <a:p>
+            <a:r>
+              <a:t>Time: 0:45</a:t>
+            </a:r>
+          </a:p>
+          <a:p>
+            <a:r>
+              <a:t>Remember: Beat the rules, predicted where, measured what the cheap one does better.</a:t>
+            </a:r>
+          </a:p>
+          <a:p/>
+          <a:p>
+            <a:r>
+              <a:t>To conclude.</a:t>
+            </a:r>
+          </a:p>
+          <a:p/>
+          <a:p>
+            <a:r>
+              <a:t>Language models beat the rule baseline in every configuration, and the testable part of my</a:t>
+            </a:r>
+          </a:p>
+          <a:p>
+            <a:r>
+              <a:t>pre-registered prediction held. The cheaper model won because the larger one extracts less.</a:t>
+            </a:r>
+          </a:p>
+          <a:p>
+            <a:r>
+              <a:t>That is measured; why it extracts less is not yet. On the like-for-like zero-shot comparison, a free open-weight model reached about</a:t>
+            </a:r>
+          </a:p>
+          <a:p>
+            <a:r>
+              <a:t>two thirds of the commercial score. And the knowledge graph is provenance-complete, verified by</a:t>
+            </a:r>
+          </a:p>
+          <a:p>
+            <a:r>
+              <a:t>query.</a:t>
+            </a:r>
+          </a:p>
+          <a:p/>
+          <a:p>
+            <a:r>
+              <a:t>For future work: obtain a refcode mapping and close RQ3, rerun both models without the</a:t>
+            </a:r>
+          </a:p>
+          <a:p>
+            <a:r>
+              <a:t>"omit when unsure" instruction to separate caution from obedience, repair the condition</a:t>
+            </a:r>
+          </a:p>
+          <a:p>
+            <a:r>
+              <a:t>evaluation, and add a second annotator.</a:t>
+            </a:r>
+          </a:p>
+          <a:p/>
+          <a:p>
+            <a:r>
+              <a:t>Thank you. I am happy to take your questions.</a:t>
+            </a:r>
+          </a:p>
+        </p:txBody>
+      </p:sp>
+      <p:sp>
+        <p:nvSpPr>
+          <p:cNvPr id="4" name="Slide Number Placeholder 3"/>
+          <p:cNvSpPr>
+            <a:spLocks noGrp="1"/>
+          </p:cNvSpPr>
+          <p:nvPr>
+            <p:ph type="sldNum" idx="5" sz="quarter"/>
+          </p:nvPr>
+        </p:nvSpPr>
+        <p:spPr/>
+      </p:sp>
+    </p:spTree>
+  </p:cSld>
+  <p:clrMapOvr>
+    <a:masterClrMapping/>
+  </p:clrMapOvr>
+</p:notes>
+</file>
+
+<file path=ppt/notesSlides/notesSlide2.xml><?xml version="1.0" encoding="utf-8"?>
+<p:notes xmlns:a="http://schemas.openxmlformats.org/drawingml/2006/main" xmlns:p="http://schemas.openxmlformats.org/presentationml/2006/main" xmlns:r="http://schemas.openxmlformats.org/officeDocument/2006/relationships">
+  <p:cSld>
+    <p:spTree>
+      <p:nvGrpSpPr>
+        <p:cNvPr id="1" name=""/>
+        <p:cNvGrpSpPr/>
+        <p:nvPr/>
+      </p:nvGrpSpPr>
+      <p:grpSpPr>
+        <a:xfrm>
+          <a:off x="0" y="0"/>
+          <a:ext cx="0" cy="0"/>
+          <a:chOff x="0" y="0"/>
+          <a:chExt cx="0" cy="0"/>
+        </a:xfrm>
+      </p:grpSpPr>
+      <p:sp>
+        <p:nvSpPr>
+          <p:cNvPr id="2" name="Slide Image Placeholder 1"/>
+          <p:cNvSpPr>
+            <a:spLocks noGrp="1"/>
+          </p:cNvSpPr>
+          <p:nvPr>
+            <p:ph type="sldImg" idx="2"/>
+          </p:nvPr>
+        </p:nvSpPr>
+        <p:spPr/>
+      </p:sp>
+      <p:sp>
+        <p:nvSpPr>
+          <p:cNvPr id="3" name="Notes Placeholder 2"/>
+          <p:cNvSpPr>
+            <a:spLocks noGrp="1"/>
+          </p:cNvSpPr>
+          <p:nvPr>
+            <p:ph type="body" idx="3" sz="quarter"/>
+          </p:nvPr>
+        </p:nvSpPr>
+        <p:spPr/>
+        <p:txBody>
+          <a:bodyPr/>
+          <a:lstStyle/>
+          <a:p>
+            <a:r>
+              <a:t>Time: 1:15</a:t>
+            </a:r>
+          </a:p>
+          <a:p>
+            <a:r>
+              <a:t>Remember: The recipes exist, but only as sentences in papers.</a:t>
+            </a:r>
+          </a:p>
+          <a:p/>
+          <a:p>
+            <a:r>
+              <a:t>First, the problem.</a:t>
+            </a:r>
+          </a:p>
+          <a:p/>
+          <a:p>
+            <a:r>
+              <a:t>Metal–organic frameworks, or MOFs, are crystals built from metal nodes connected by organic</a:t>
+            </a:r>
+          </a:p>
+          <a:p>
+            <a:r>
+              <a:t>linkers. Inside they are mostly empty space, and that is what makes them useful: capturing</a:t>
+            </a:r>
+          </a:p>
+          <a:p>
+            <a:r>
+              <a:t>carbon dioxide, storing gas, catalysis, drug delivery. More than a hundred thousand of them are</a:t>
+            </a:r>
+          </a:p>
+          <a:p>
+            <a:r>
+              <a:t>recorded in the Cambridge Structural Database.</a:t>
+            </a:r>
+          </a:p>
+          <a:p/>
+          <a:p>
+            <a:r>
+              <a:t>Every one was made by following a recipe: a metal precursor, a linker, a solvent, a method, a</a:t>
+            </a:r>
+          </a:p>
+          <a:p>
+            <a:r>
+              <a:t>temperature and a time. But those recipes are written as sentences, inside tens of thousands of</a:t>
+            </a:r>
+          </a:p>
+          <a:p>
+            <a:r>
+              <a:t>papers. There is no complete structured table of them.</a:t>
+            </a:r>
+          </a:p>
+          <a:p/>
+          <a:p>
+            <a:r>
+              <a:t>The databases that do exist, like DigiMOF, were built with rule-based text mining. And their own</a:t>
+            </a:r>
+          </a:p>
+          <a:p>
+            <a:r>
+              <a:t>authors wrote that routes a paper only implies are hard for rules to extract.</a:t>
+            </a:r>
+          </a:p>
+          <a:p/>
+          <a:p>
+            <a:r>
+              <a:t>[point to the box] So the gap is this. Nobody had measured language-model extraction of MOF</a:t>
+            </a:r>
+          </a:p>
+          <a:p>
+            <a:r>
+              <a:t>recipes field by field, against both a human answer key and a rule-based baseline, and reported</a:t>
+            </a:r>
+          </a:p>
+          <a:p>
+            <a:r>
+              <a:t>the cost.</a:t>
+            </a:r>
+          </a:p>
+        </p:txBody>
+      </p:sp>
+      <p:sp>
+        <p:nvSpPr>
+          <p:cNvPr id="4" name="Slide Number Placeholder 3"/>
+          <p:cNvSpPr>
+            <a:spLocks noGrp="1"/>
+          </p:cNvSpPr>
+          <p:nvPr>
+            <p:ph type="sldNum" idx="5" sz="quarter"/>
+          </p:nvPr>
+        </p:nvSpPr>
+        <p:spPr/>
+      </p:sp>
+    </p:spTree>
+  </p:cSld>
+  <p:clrMapOvr>
+    <a:masterClrMapping/>
+  </p:clrMapOvr>
+</p:notes>
+</file>
+
+<file path=ppt/notesSlides/notesSlide3.xml><?xml version="1.0" encoding="utf-8"?>
+<p:notes xmlns:a="http://schemas.openxmlformats.org/drawingml/2006/main" xmlns:p="http://schemas.openxmlformats.org/presentationml/2006/main" xmlns:r="http://schemas.openxmlformats.org/officeDocument/2006/relationships">
+  <p:cSld>
+    <p:spTree>
+      <p:nvGrpSpPr>
+        <p:cNvPr id="1" name=""/>
+        <p:cNvGrpSpPr/>
+        <p:nvPr/>
+      </p:nvGrpSpPr>
+      <p:grpSpPr>
+        <a:xfrm>
+          <a:off x="0" y="0"/>
+          <a:ext cx="0" cy="0"/>
+          <a:chOff x="0" y="0"/>
+          <a:chExt cx="0" cy="0"/>
+        </a:xfrm>
+      </p:grpSpPr>
+      <p:sp>
+        <p:nvSpPr>
+          <p:cNvPr id="2" name="Slide Image Placeholder 1"/>
+          <p:cNvSpPr>
+            <a:spLocks noGrp="1"/>
+          </p:cNvSpPr>
+          <p:nvPr>
+            <p:ph type="sldImg" idx="2"/>
+          </p:nvPr>
+        </p:nvSpPr>
+        <p:spPr/>
+      </p:sp>
+      <p:sp>
+        <p:nvSpPr>
+          <p:cNvPr id="3" name="Notes Placeholder 2"/>
+          <p:cNvSpPr>
+            <a:spLocks noGrp="1"/>
+          </p:cNvSpPr>
+          <p:nvPr>
+            <p:ph type="body" idx="3" sz="quarter"/>
+          </p:nvPr>
+        </p:nvSpPr>
+        <p:spPr/>
+        <p:txBody>
+          <a:bodyPr/>
+          <a:lstStyle/>
+          <a:p>
+            <a:r>
+              <a:t>Time: 1:00 *(can shorten)*</a:t>
+            </a:r>
+          </a:p>
+          <a:p>
+            <a:r>
+              <a:t>Remember: Five questions, four answered, and the fifth has a reason.</a:t>
+            </a:r>
+          </a:p>
+          <a:p/>
+          <a:p>
+            <a:r>
+              <a:t>That gives five research questions.</a:t>
+            </a:r>
+          </a:p>
+          <a:p/>
+          <a:p>
+            <a:r>
+              <a:t>RQ1: field by field, how do language models compare with a rule-based baseline built from the</a:t>
+            </a:r>
+          </a:p>
+          <a:p>
+            <a:r>
+              <a:t>same vocabulary?</a:t>
+            </a:r>
+          </a:p>
+          <a:p/>
+          <a:p>
+            <a:r>
+              <a:t>RQ2: which of four prompting strategies works best?</a:t>
+            </a:r>
+          </a:p>
+          <a:p/>
+          <a:p>
+            <a:r>
+              <a:t>RQ3: where do the extractions disagree with DigiMOF and SynMOF?</a:t>
+            </a:r>
+          </a:p>
+          <a:p/>
+          <a:p>
+            <a:r>
+              <a:t>RQ4: open-weight models against commercial ones, on accuracy, cost and latency.</a:t>
+            </a:r>
+          </a:p>
+          <a:p/>
+          <a:p>
+            <a:r>
+              <a:t>And RQ5: can the knowledge graph answer questions across hundreds of papers?</a:t>
+            </a:r>
+          </a:p>
+          <a:p/>
+          <a:p>
+            <a:r>
+              <a:t>I answered four of the five. RQ3 I could not answer, and I will explain exactly why near the</a:t>
+            </a:r>
+          </a:p>
+          <a:p>
+            <a:r>
+              <a:t>end, because I think the reason is a finding in itself.</a:t>
+            </a:r>
+          </a:p>
+        </p:txBody>
+      </p:sp>
+      <p:sp>
+        <p:nvSpPr>
+          <p:cNvPr id="4" name="Slide Number Placeholder 3"/>
+          <p:cNvSpPr>
+            <a:spLocks noGrp="1"/>
+          </p:cNvSpPr>
+          <p:nvPr>
+            <p:ph type="sldNum" idx="5" sz="quarter"/>
+          </p:nvPr>
+        </p:nvSpPr>
+        <p:spPr/>
+      </p:sp>
+    </p:spTree>
+  </p:cSld>
+  <p:clrMapOvr>
+    <a:masterClrMapping/>
+  </p:clrMapOvr>
+</p:notes>
+</file>
+
+<file path=ppt/notesSlides/notesSlide4.xml><?xml version="1.0" encoding="utf-8"?>
+<p:notes xmlns:a="http://schemas.openxmlformats.org/drawingml/2006/main" xmlns:p="http://schemas.openxmlformats.org/presentationml/2006/main" xmlns:r="http://schemas.openxmlformats.org/officeDocument/2006/relationships">
+  <p:cSld>
+    <p:spTree>
+      <p:nvGrpSpPr>
+        <p:cNvPr id="1" name=""/>
+        <p:cNvGrpSpPr/>
+        <p:nvPr/>
+      </p:nvGrpSpPr>
+      <p:grpSpPr>
+        <a:xfrm>
+          <a:off x="0" y="0"/>
+          <a:ext cx="0" cy="0"/>
+          <a:chOff x="0" y="0"/>
+          <a:chExt cx="0" cy="0"/>
+        </a:xfrm>
+      </p:grpSpPr>
+      <p:sp>
+        <p:nvSpPr>
+          <p:cNvPr id="2" name="Slide Image Placeholder 1"/>
+          <p:cNvSpPr>
+            <a:spLocks noGrp="1"/>
+          </p:cNvSpPr>
+          <p:nvPr>
+            <p:ph type="sldImg" idx="2"/>
+          </p:nvPr>
+        </p:nvSpPr>
+        <p:spPr/>
+      </p:sp>
+      <p:sp>
+        <p:nvSpPr>
+          <p:cNvPr id="3" name="Notes Placeholder 2"/>
+          <p:cNvSpPr>
+            <a:spLocks noGrp="1"/>
+          </p:cNvSpPr>
+          <p:nvPr>
+            <p:ph type="body" idx="3" sz="quarter"/>
+          </p:nvPr>
+        </p:nvSpPr>
+        <p:spPr/>
+        <p:txBody>
+          <a:bodyPr/>
+          <a:lstStyle/>
+          <a:p>
+            <a:r>
+              <a:t>Time: 1:30</a:t>
+            </a:r>
+          </a:p>
+          <a:p>
+            <a:r>
+              <a:t>Remember: Every extractor has the same interface, so the comparison is fair.</a:t>
+            </a:r>
+          </a:p>
+          <a:p/>
+          <a:p>
+            <a:r>
+              <a:t>This is the pipeline.</a:t>
+            </a:r>
+          </a:p>
+          <a:p/>
+          <a:p>
+            <a:r>
+              <a:t>[start at the top left] I collected 399 open-access papers from Europe PMC, with their sections</a:t>
+            </a:r>
+          </a:p>
+          <a:p>
+            <a:r>
+              <a:t>already labelled. The segmentation step cut them into 22,086 passages and scored each one on how</a:t>
+            </a:r>
+          </a:p>
+          <a:p>
+            <a:r>
+              <a:t>much it looks like a synthesis procedure. 794 passed the threshold.</a:t>
+            </a:r>
+          </a:p>
+          <a:p/>
+          <a:p>
+            <a:r>
+              <a:t>[point to Extraction] Then extraction. The rule-based baseline and the language models sit</a:t>
+            </a:r>
+          </a:p>
+          <a:p>
+            <a:r>
+              <a:t>inside one stage, because they all implement the same interface and return exactly the same</a:t>
+            </a:r>
+          </a:p>
+          <a:p>
+            <a:r>
+              <a:t>output shape. That is the design decision that makes the comparison fair: every extractor is</a:t>
+            </a:r>
+          </a:p>
+          <a:p>
+            <a:r>
+              <a:t>scored on identical terms.</a:t>
+            </a:r>
+          </a:p>
+          <a:p/>
+          <a:p>
+            <a:r>
+              <a:t>[point to the orange boxes] Notice that every stage writes a file to disk, and the next stage</a:t>
+            </a:r>
+          </a:p>
+          <a:p>
+            <a:r>
+              <a:t>reads it. So I can rerun any single stage without rerunning the rest, and every intermediate</a:t>
+            </a:r>
+          </a:p>
+          <a:p>
+            <a:r>
+              <a:t>result can be opened and checked. Every language-model response is also cached, so I never paid</a:t>
+            </a:r>
+          </a:p>
+          <a:p>
+            <a:r>
+              <a:t>twice for the same call.</a:t>
+            </a:r>
+          </a:p>
+          <a:p/>
+          <a:p>
+            <a:r>
+              <a:t>[point to the green boxes] At the end, the results go to evaluation, and into a Neo4j knowledge</a:t>
+            </a:r>
+          </a:p>
+          <a:p>
+            <a:r>
+              <a:t>graph.</a:t>
+            </a:r>
+          </a:p>
+        </p:txBody>
+      </p:sp>
+      <p:sp>
+        <p:nvSpPr>
+          <p:cNvPr id="4" name="Slide Number Placeholder 3"/>
+          <p:cNvSpPr>
+            <a:spLocks noGrp="1"/>
+          </p:cNvSpPr>
+          <p:nvPr>
+            <p:ph type="sldNum" idx="5" sz="quarter"/>
+          </p:nvPr>
+        </p:nvSpPr>
+        <p:spPr/>
+      </p:sp>
+    </p:spTree>
+  </p:cSld>
+  <p:clrMapOvr>
+    <a:masterClrMapping/>
+  </p:clrMapOvr>
+</p:notes>
+</file>
+
+<file path=ppt/notesSlides/notesSlide5.xml><?xml version="1.0" encoding="utf-8"?>
+<p:notes xmlns:a="http://schemas.openxmlformats.org/drawingml/2006/main" xmlns:p="http://schemas.openxmlformats.org/presentationml/2006/main" xmlns:r="http://schemas.openxmlformats.org/officeDocument/2006/relationships">
+  <p:cSld>
+    <p:spTree>
+      <p:nvGrpSpPr>
+        <p:cNvPr id="1" name=""/>
+        <p:cNvGrpSpPr/>
+        <p:nvPr/>
+      </p:nvGrpSpPr>
+      <p:grpSpPr>
+        <a:xfrm>
+          <a:off x="0" y="0"/>
+          <a:ext cx="0" cy="0"/>
+          <a:chOff x="0" y="0"/>
+          <a:chExt cx="0" cy="0"/>
+        </a:xfrm>
+      </p:grpSpPr>
+      <p:sp>
+        <p:nvSpPr>
+          <p:cNvPr id="2" name="Slide Image Placeholder 1"/>
+          <p:cNvSpPr>
+            <a:spLocks noGrp="1"/>
+          </p:cNvSpPr>
+          <p:nvPr>
+            <p:ph type="sldImg" idx="2"/>
+          </p:nvPr>
+        </p:nvSpPr>
+        <p:spPr/>
+      </p:sp>
+      <p:sp>
+        <p:nvSpPr>
+          <p:cNvPr id="3" name="Notes Placeholder 2"/>
+          <p:cNvSpPr>
+            <a:spLocks noGrp="1"/>
+          </p:cNvSpPr>
+          <p:nvPr>
+            <p:ph type="body" idx="3" sz="quarter"/>
+          </p:nvPr>
+        </p:nvSpPr>
+        <p:spPr/>
+        <p:txBody>
+          <a:bodyPr/>
+          <a:lstStyle/>
+          <a:p>
+            <a:r>
+              <a:t>Time: 1:15</a:t>
+            </a:r>
+          </a:p>
+          <a:p>
+            <a:r>
+              <a:t>Remember: The answer key was made by hand, because a model-made one would be circular.</a:t>
+            </a:r>
+          </a:p>
+          <a:p/>
+          <a:p>
+            <a:r>
+              <a:t>The most important part of the whole project is this one: the gold standard, the answer key.</a:t>
+            </a:r>
+          </a:p>
+          <a:p/>
+          <a:p>
+            <a:r>
+              <a:t>I annotated 100 passages by hand, which gave 138 facts, or triples.</a:t>
+            </a:r>
+          </a:p>
+          <a:p/>
+          <a:p>
+            <a:r>
+              <a:t>The sample was stratified with a fixed seed: 90 passages the filter had flagged as synthesis,</a:t>
+            </a:r>
+          </a:p>
+          <a:p>
+            <a:r>
+              <a:t>and 10 it had not. Those 10 controls let me measure how often the filter itself misses a recipe,</a:t>
+            </a:r>
+          </a:p>
+          <a:p>
+            <a:r>
+              <a:t>instead of simply assuming it works.</a:t>
+            </a:r>
+          </a:p>
+          <a:p/>
+          <a:p>
+            <a:r>
+              <a:t>[point to the box] And I deliberately did not let any model pre-fill it. The gold standard is</a:t>
+            </a:r>
+          </a:p>
+          <a:p>
+            <a:r>
+              <a:t>the ruler every model is measured against. If a language model had written it, the evaluation</a:t>
+            </a:r>
+          </a:p>
+          <a:p>
+            <a:r>
+              <a:t>would be circular: any mistake the models share would be counted as correct.</a:t>
+            </a:r>
+          </a:p>
+        </p:txBody>
+      </p:sp>
+      <p:sp>
+        <p:nvSpPr>
+          <p:cNvPr id="4" name="Slide Number Placeholder 3"/>
+          <p:cNvSpPr>
+            <a:spLocks noGrp="1"/>
+          </p:cNvSpPr>
+          <p:nvPr>
+            <p:ph type="sldNum" idx="5" sz="quarter"/>
+          </p:nvPr>
+        </p:nvSpPr>
+        <p:spPr/>
+      </p:sp>
+    </p:spTree>
+  </p:cSld>
+  <p:clrMapOvr>
+    <a:masterClrMapping/>
+  </p:clrMapOvr>
+</p:notes>
+</file>
+
+<file path=ppt/notesSlides/notesSlide6.xml><?xml version="1.0" encoding="utf-8"?>
+<p:notes xmlns:a="http://schemas.openxmlformats.org/drawingml/2006/main" xmlns:p="http://schemas.openxmlformats.org/presentationml/2006/main" xmlns:r="http://schemas.openxmlformats.org/officeDocument/2006/relationships">
+  <p:cSld>
+    <p:spTree>
+      <p:nvGrpSpPr>
+        <p:cNvPr id="1" name=""/>
+        <p:cNvGrpSpPr/>
+        <p:nvPr/>
+      </p:nvGrpSpPr>
+      <p:grpSpPr>
+        <a:xfrm>
+          <a:off x="0" y="0"/>
+          <a:ext cx="0" cy="0"/>
+          <a:chOff x="0" y="0"/>
+          <a:chExt cx="0" cy="0"/>
+        </a:xfrm>
+      </p:grpSpPr>
+      <p:sp>
+        <p:nvSpPr>
+          <p:cNvPr id="2" name="Slide Image Placeholder 1"/>
+          <p:cNvSpPr>
+            <a:spLocks noGrp="1"/>
+          </p:cNvSpPr>
+          <p:nvPr>
+            <p:ph type="sldImg" idx="2"/>
+          </p:nvPr>
+        </p:nvSpPr>
+        <p:spPr/>
+      </p:sp>
+      <p:sp>
+        <p:nvSpPr>
+          <p:cNvPr id="3" name="Notes Placeholder 2"/>
+          <p:cNvSpPr>
+            <a:spLocks noGrp="1"/>
+          </p:cNvSpPr>
+          <p:nvPr>
+            <p:ph type="body" idx="3" sz="quarter"/>
+          </p:nvPr>
+        </p:nvSpPr>
+        <p:spPr/>
+        <p:txBody>
+          <a:bodyPr/>
+          <a:lstStyle/>
+          <a:p>
+            <a:r>
+              <a:t>Time: 1:15</a:t>
+            </a:r>
+          </a:p>
+          <a:p>
+            <a:r>
+              <a:t>Remember: Provenance is added by the pipeline, so it cannot be hallucinated.</a:t>
+            </a:r>
+          </a:p>
+          <a:p/>
+          <a:p>
+            <a:r>
+              <a:t>This is the ontology: the schema of what gets extracted. Nine entity types and nine relations,</a:t>
+            </a:r>
+          </a:p>
+          <a:p>
+            <a:r>
+              <a:t>with the MOF at the centre.</a:t>
+            </a:r>
+          </a:p>
+          <a:p/>
+          <a:p>
+            <a:r>
+              <a:t>Two details matter. [point] Solvent and Condition attach to the SynthesisMethod, not directly to</a:t>
+            </a:r>
+          </a:p>
+          <a:p>
+            <a:r>
+              <a:t>the MOF. And MENTIONED_IN, the link back to the source paper, is added by the pipeline and never</a:t>
+            </a:r>
+          </a:p>
+          <a:p>
+            <a:r>
+              <a:t>by a model, so provenance cannot be hallucinated.</a:t>
+            </a:r>
+          </a:p>
+          <a:p/>
+          <a:p>
+            <a:r>
+              <a:t>Matching is done per passage and per relation, one to one, so no answer can be credited twice.</a:t>
+            </a:r>
+          </a:p>
+          <a:p/>
+          <a:p>
+            <a:r>
+              <a:t>And one thing I declare openly. My annotation tool had a bug: it kept the MOF name in the</a:t>
+            </a:r>
+          </a:p>
+          <a:p>
+            <a:r>
+              <a:t>subject field of the solvent and condition triples. Rather than let a model rewrite the gold</a:t>
+            </a:r>
+          </a:p>
+          <a:p>
+            <a:r>
+              <a:t>standard, I scored those two relations on the object only, and the report says so.</a:t>
+            </a:r>
+          </a:p>
+        </p:txBody>
+      </p:sp>
+      <p:sp>
+        <p:nvSpPr>
+          <p:cNvPr id="4" name="Slide Number Placeholder 3"/>
+          <p:cNvSpPr>
+            <a:spLocks noGrp="1"/>
+          </p:cNvSpPr>
+          <p:nvPr>
+            <p:ph type="sldNum" idx="5" sz="quarter"/>
+          </p:nvPr>
+        </p:nvSpPr>
+        <p:spPr/>
+      </p:sp>
+    </p:spTree>
+  </p:cSld>
+  <p:clrMapOvr>
+    <a:masterClrMapping/>
+  </p:clrMapOvr>
+</p:notes>
+</file>
+
+<file path=ppt/notesSlides/notesSlide7.xml><?xml version="1.0" encoding="utf-8"?>
+<p:notes xmlns:a="http://schemas.openxmlformats.org/drawingml/2006/main" xmlns:p="http://schemas.openxmlformats.org/presentationml/2006/main" xmlns:r="http://schemas.openxmlformats.org/officeDocument/2006/relationships">
+  <p:cSld>
+    <p:spTree>
+      <p:nvGrpSpPr>
+        <p:cNvPr id="1" name=""/>
+        <p:cNvGrpSpPr/>
+        <p:nvPr/>
+      </p:nvGrpSpPr>
+      <p:grpSpPr>
+        <a:xfrm>
+          <a:off x="0" y="0"/>
+          <a:ext cx="0" cy="0"/>
+          <a:chOff x="0" y="0"/>
+          <a:chExt cx="0" cy="0"/>
+        </a:xfrm>
+      </p:grpSpPr>
+      <p:sp>
+        <p:nvSpPr>
+          <p:cNvPr id="2" name="Slide Image Placeholder 1"/>
+          <p:cNvSpPr>
+            <a:spLocks noGrp="1"/>
+          </p:cNvSpPr>
+          <p:nvPr>
+            <p:ph type="sldImg" idx="2"/>
+          </p:nvPr>
+        </p:nvSpPr>
+        <p:spPr/>
+      </p:sp>
+      <p:sp>
+        <p:nvSpPr>
+          <p:cNvPr id="3" name="Notes Placeholder 2"/>
+          <p:cNvSpPr>
+            <a:spLocks noGrp="1"/>
+          </p:cNvSpPr>
+          <p:nvPr>
+            <p:ph type="body" idx="3" sz="quarter"/>
+          </p:nvPr>
+        </p:nvSpPr>
+        <p:spPr/>
+        <p:txBody>
+          <a:bodyPr/>
+          <a:lstStyle/>
+          <a:p>
+            <a:r>
+              <a:t>Time: 1:00</a:t>
+            </a:r>
+          </a:p>
+          <a:p>
+            <a:r>
+              <a:t>Remember: Every model beat the rules, and the best one was also one of the cheapest.</a:t>
+            </a:r>
+          </a:p>
+          <a:p/>
+          <a:p>
+            <a:r>
+              <a:t>Now the results. Ten configurations: the rule baseline, two commercial models, gpt-4o and</a:t>
+            </a:r>
+          </a:p>
+          <a:p>
+            <a:r>
+              <a:t>gpt-4o-mini, and one open-weight model, with different prompting strategies. The complete set of</a:t>
+            </a:r>
+          </a:p>
+          <a:p>
+            <a:r>
+              <a:t>experiments cost an estimated 3.06 US dollars, calculated from the recorded token counts at the</a:t>
+            </a:r>
+          </a:p>
+          <a:p>
+            <a:r>
+              <a:t>providers' published prices.</a:t>
+            </a:r>
+          </a:p>
+          <a:p/>
+          <a:p>
+            <a:r>
+              <a:t>[point to the chart] Cost runs along the bottom, accuracy up the side, measured as F1.</a:t>
+            </a:r>
+          </a:p>
+          <a:p/>
+          <a:p>
+            <a:r>
+              <a:t>Two things stand out. Every language-model configuration beats the rule baseline: the weakest</a:t>
+            </a:r>
+          </a:p>
+          <a:p>
+            <a:r>
+              <a:t>scores 0.191, the baseline 0.112. And the best configuration, here at the top left, is also one</a:t>
+            </a:r>
+          </a:p>
+          <a:p>
+            <a:r>
+              <a:t>of the cheapest.</a:t>
+            </a:r>
+          </a:p>
+        </p:txBody>
+      </p:sp>
+      <p:sp>
+        <p:nvSpPr>
+          <p:cNvPr id="4" name="Slide Number Placeholder 3"/>
+          <p:cNvSpPr>
+            <a:spLocks noGrp="1"/>
+          </p:cNvSpPr>
+          <p:nvPr>
+            <p:ph type="sldNum" idx="5" sz="quarter"/>
+          </p:nvPr>
+        </p:nvSpPr>
+        <p:spPr/>
+      </p:sp>
+    </p:spTree>
+  </p:cSld>
+  <p:clrMapOvr>
+    <a:masterClrMapping/>
+  </p:clrMapOvr>
+</p:notes>
+</file>
+
+<file path=ppt/notesSlides/notesSlide8.xml><?xml version="1.0" encoding="utf-8"?>
+<p:notes xmlns:a="http://schemas.openxmlformats.org/drawingml/2006/main" xmlns:p="http://schemas.openxmlformats.org/presentationml/2006/main" xmlns:r="http://schemas.openxmlformats.org/officeDocument/2006/relationships">
+  <p:cSld>
+    <p:spTree>
+      <p:nvGrpSpPr>
+        <p:cNvPr id="1" name=""/>
+        <p:cNvGrpSpPr/>
+        <p:nvPr/>
+      </p:nvGrpSpPr>
+      <p:grpSpPr>
+        <a:xfrm>
+          <a:off x="0" y="0"/>
+          <a:ext cx="0" cy="0"/>
+          <a:chOff x="0" y="0"/>
+          <a:chExt cx="0" cy="0"/>
+        </a:xfrm>
+      </p:grpSpPr>
+      <p:sp>
+        <p:nvSpPr>
+          <p:cNvPr id="2" name="Slide Image Placeholder 1"/>
+          <p:cNvSpPr>
+            <a:spLocks noGrp="1"/>
+          </p:cNvSpPr>
+          <p:nvPr>
+            <p:ph type="sldImg" idx="2"/>
+          </p:nvPr>
+        </p:nvSpPr>
+        <p:spPr/>
+      </p:sp>
+      <p:sp>
+        <p:nvSpPr>
+          <p:cNvPr id="3" name="Notes Placeholder 2"/>
+          <p:cNvSpPr>
+            <a:spLocks noGrp="1"/>
+          </p:cNvSpPr>
+          <p:nvPr>
+            <p:ph type="body" idx="3" sz="quarter"/>
+          </p:nvPr>
+        </p:nvSpPr>
+        <p:spPr/>
+        <p:txBody>
+          <a:bodyPr/>
+          <a:lstStyle/>
+          <a:p>
+            <a:r>
+              <a:t>Time: 1:30</a:t>
+            </a:r>
+          </a:p>
+          <a:p>
+            <a:r>
+              <a:t>Remember: I predicted it in advance; the part that can be tested held.</a:t>
+            </a:r>
+          </a:p>
+          <a:p/>
+          <a:p>
+            <a:r>
+              <a:t>Now field by field.</a:t>
+            </a:r>
+          </a:p>
+          <a:p/>
+          <a:p>
+            <a:r>
+              <a:t>On 23 August, eight days before the first model results were recorded, I wrote down a</a:t>
+            </a:r>
+          </a:p>
+          <a:p>
+            <a:r>
+              <a:t>prediction and committed it to the repository. [point to the box] The language models should beat the rules by</a:t>
+            </a:r>
+          </a:p>
+          <a:p>
+            <a:r>
+              <a:t>the most on the metal precursor, the linker and the synthesis method, and by the least on</a:t>
+            </a:r>
+          </a:p>
+          <a:p>
+            <a:r>
+              <a:t>conditions and solvents. My reasoning was that working out which material is being made needs</a:t>
+            </a:r>
+          </a:p>
+          <a:p>
+            <a:r>
+              <a:t>reading comprehension, whereas a temperature or a solvent name is a simple pattern.</a:t>
+            </a:r>
+          </a:p>
+          <a:p/>
+          <a:p>
+            <a:r>
+              <a:t>One of those three, the synthesis method, has only a single triple in my gold standard, so it</a:t>
+            </a:r>
+          </a:p>
+          <a:p>
+            <a:r>
+              <a:t>cannot be tested either way. On the four fields that can be tested, the margins were plus 0.42,</a:t>
+            </a:r>
+          </a:p>
+          <a:p>
+            <a:r>
+              <a:t>0.31, 0.25 and 0.17. Precursor and linker lead, solvent and condition trail, as predicted. And</a:t>
+            </a:r>
+          </a:p>
+          <a:p>
+            <a:r>
+              <a:t>because it was written down first, that part is a genuine confirmation.</a:t>
+            </a:r>
+          </a:p>
+          <a:p/>
+          <a:p>
+            <a:r>
+              <a:t>One caveat. The condition scores are low for every system, because I annotated conditions as one</a:t>
+            </a:r>
+          </a:p>
+          <a:p>
+            <a:r>
+              <a:t>combined string, while the models split them into separate parts. So that field measures</a:t>
+            </a:r>
+          </a:p>
+          <a:p>
+            <a:r>
+              <a:t>annotation style rather than accuracy, and I leave it out of my conclusions. Without it, the best</a:t>
+            </a:r>
+          </a:p>
+          <a:p>
+            <a:r>
+              <a:t>configuration averages about 0.53.</a:t>
+            </a:r>
+          </a:p>
+        </p:txBody>
+      </p:sp>
+      <p:sp>
+        <p:nvSpPr>
+          <p:cNvPr id="4" name="Slide Number Placeholder 3"/>
+          <p:cNvSpPr>
+            <a:spLocks noGrp="1"/>
+          </p:cNvSpPr>
+          <p:nvPr>
+            <p:ph type="sldNum" idx="5" sz="quarter"/>
+          </p:nvPr>
+        </p:nvSpPr>
+        <p:spPr/>
+      </p:sp>
+    </p:spTree>
+  </p:cSld>
+  <p:clrMapOvr>
+    <a:masterClrMapping/>
+  </p:clrMapOvr>
+</p:notes>
+</file>
+
+<file path=ppt/notesSlides/notesSlide9.xml><?xml version="1.0" encoding="utf-8"?>
+<p:notes xmlns:a="http://schemas.openxmlformats.org/drawingml/2006/main" xmlns:p="http://schemas.openxmlformats.org/presentationml/2006/main" xmlns:r="http://schemas.openxmlformats.org/officeDocument/2006/relationships">
+  <p:cSld>
+    <p:spTree>
+      <p:nvGrpSpPr>
+        <p:cNvPr id="1" name=""/>
+        <p:cNvGrpSpPr/>
+        <p:nvPr/>
+      </p:nvGrpSpPr>
+      <p:grpSpPr>
+        <a:xfrm>
+          <a:off x="0" y="0"/>
+          <a:ext cx="0" cy="0"/>
+          <a:chOff x="0" y="0"/>
+          <a:chExt cx="0" cy="0"/>
+        </a:xfrm>
+      </p:grpSpPr>
+      <p:sp>
+        <p:nvSpPr>
+          <p:cNvPr id="2" name="Slide Image Placeholder 1"/>
+          <p:cNvSpPr>
+            <a:spLocks noGrp="1"/>
+          </p:cNvSpPr>
+          <p:nvPr>
+            <p:ph type="sldImg" idx="2"/>
+          </p:nvPr>
+        </p:nvSpPr>
+        <p:spPr/>
+      </p:sp>
+      <p:sp>
+        <p:nvSpPr>
+          <p:cNvPr id="3" name="Notes Placeholder 2"/>
+          <p:cNvSpPr>
+            <a:spLocks noGrp="1"/>
+          </p:cNvSpPr>
+          <p:nvPr>
+            <p:ph type="body" idx="3" sz="quarter"/>
+          </p:nvPr>
+        </p:nvSpPr>
+        <p:spPr/>
+        <p:txBody>
+          <a:bodyPr/>
+          <a:lstStyle/>
+          <a:p>
+            <a:r>
+              <a:t>Time: 1:45</a:t>
+            </a:r>
+          </a:p>
+          <a:p>
+            <a:r>
+              <a:t>Remember: gpt-4o extracts less. Measured. Why, not yet.</a:t>
+            </a:r>
+          </a:p>
+          <a:p/>
+          <a:p>
+            <a:r>
+              <a:t>This is the result I think matters most. The cheap model beat the expensive one.</a:t>
+            </a:r>
+          </a:p>
+          <a:p/>
+          <a:p>
+            <a:r>
+              <a:t>[point to the numbers] gpt-4o-mini with schema-guided prompting scored 0.364, for under three</a:t>
+            </a:r>
+          </a:p>
+          <a:p>
+            <a:r>
+              <a:t>cents. gpt-4o with few-shot prompting cost 1.29 dollars and scored 0.245. That is a 47 times</a:t>
+            </a:r>
+          </a:p>
+          <a:p>
+            <a:r>
+              <a:t>cost difference, in favour of the weaker model.</a:t>
+            </a:r>
+          </a:p>
+          <a:p/>
+          <a:p>
+            <a:r>
+              <a:t>My first explanation was that the bigger model writes more, and the extra output turns into</a:t>
+            </a:r>
+          </a:p>
+          <a:p>
+            <a:r>
+              <a:t>false positives. But that is a claim I could test for free, because every output was saved. So</a:t>
+            </a:r>
+          </a:p>
+          <a:p>
+            <a:r>
+              <a:t>I counted.</a:t>
+            </a:r>
+          </a:p>
+          <a:p/>
+          <a:p>
+            <a:r>
+              <a:t>It was wrong, and wrong in the opposite direction. gpt-4o produces fewer triples than</a:t>
+            </a:r>
+          </a:p>
+          <a:p>
+            <a:r>
+              <a:t>gpt-4o-mini in all four strategies. The gap is not precision, it is recall. On schema-guided,</a:t>
+            </a:r>
+          </a:p>
+          <a:p>
+            <a:r>
+              <a:t>gpt-4o finds 39 of the 138 correct facts, gpt-4o-mini finds 61, and precision is almost the</a:t>
+            </a:r>
+          </a:p>
+          <a:p>
+            <a:r>
+              <a:t>same.</a:t>
+            </a:r>
+          </a:p>
+          <a:p/>
+          <a:p>
+            <a:r>
+              <a:t>So the larger model extracts less. But I have to be honest about one thing. Every one of my</a:t>
+            </a:r>
+          </a:p>
+          <a:p>
+            <a:r>
+              <a:t>prompts tells the model to leave a fact out if it is unsure. So gpt-4o might be more cautious</a:t>
+            </a:r>
+          </a:p>
+          <a:p>
+            <a:r>
+              <a:t>by nature, or it might simply follow my instruction more faithfully. My design cannot tell those</a:t>
+            </a:r>
+          </a:p>
+          <a:p>
+            <a:r>
+              <a:t>two apart. The fix is simple: run both models again without that line.</a:t>
+            </a:r>
+          </a:p>
+        </p:txBody>
+      </p:sp>
+      <p:sp>
+        <p:nvSpPr>
+          <p:cNvPr id="4" name="Slide Number Placeholder 3"/>
+          <p:cNvSpPr>
+            <a:spLocks noGrp="1"/>
+          </p:cNvSpPr>
+          <p:nvPr>
+            <p:ph type="sldNum" idx="5" sz="quarter"/>
+          </p:nvPr>
+        </p:nvSpPr>
+        <p:spPr/>
+      </p:sp>
+    </p:spTree>
+  </p:cSld>
+  <p:clrMapOvr>
+    <a:masterClrMapping/>
+  </p:clrMapOvr>
+</p:notes>
 </file>
 
 <file path=ppt/slideLayouts/slideLayout1.xml><?xml version="1.0" encoding="utf-8"?>
@@ -5040,7 +7113,7 @@
                 </a:solidFill>
                 <a:latin typeface="Lato"/>
               </a:rPr>
-              <a:t>Language models beat the rule baseline on every configuration tested, and by the largest margin exactly where a pre-registered prediction said they would.</a:t>
+              <a:t>Language models beat the rule baseline on every configuration tested, and the testable part of a pre-registered prediction held.</a:t>
             </a:r>
           </a:p>
           <a:p>
@@ -5071,7 +7144,7 @@
                 </a:solidFill>
                 <a:latin typeface="Lato"/>
               </a:rPr>
-              <a:t>The cheaper model won, and the mechanism is under-extraction by the larger model, measured rather than assumed.</a:t>
+              <a:t>The cheaper model won because the larger one extracts less. That is measured; why it extracts less is not.</a:t>
             </a:r>
           </a:p>
           <a:p>
@@ -5102,7 +7175,7 @@
                 </a:solidFill>
                 <a:latin typeface="Lato"/>
               </a:rPr>
-              <a:t>An open-weight model reached about two thirds of the best commercial F1 at zero marginal cost.</a:t>
+              <a:t>On the like-for-like zero-shot comparison, an open-weight model reached about two thirds of the commercial F1 at zero marginal cost.</a:t>
             </a:r>
           </a:p>
           <a:p>
@@ -5147,7 +7220,7 @@
         <p:spPr>
           <a:xfrm>
             <a:off x="7635240" y="2286000"/>
-            <a:ext cx="3977639" cy="3017520"/>
+            <a:ext cx="3977639" cy="3611880"/>
           </a:xfrm>
           <a:prstGeom prst="rect">
             <a:avLst/>
@@ -5177,7 +7250,7 @@
         <p:spPr>
           <a:xfrm>
             <a:off x="7936992" y="2560320"/>
-            <a:ext cx="3383280" cy="2560320"/>
+            <a:ext cx="3383280" cy="3154680"/>
           </a:xfrm>
           <a:prstGeom prst="rect">
             <a:avLst/>
@@ -5252,7 +7325,7 @@
                 </a:solidFill>
                 <a:latin typeface="Lato"/>
               </a:rPr>
-              <a:t>Finish the error review: why gpt-4o declines to extract.</a:t>
+              <a:t>Rerun without the “omit when unsure” instruction, to separate caution from obedience.</a:t>
             </a:r>
           </a:p>
           <a:p>
@@ -7928,7 +10001,7 @@
                 </a:solidFill>
                 <a:latin typeface="Lato"/>
               </a:rPr>
-              <a:t>Recorded before any model was run</a:t>
+              <a:t>Committed 23 August, before any results existed</a:t>
             </a:r>
           </a:p>
           <a:p>
@@ -7944,13 +10017,13 @@
               </a:spcAft>
             </a:pPr>
             <a:r>
-              <a:rPr sz="1350" b="0" i="1">
+              <a:rPr sz="1300" b="0" i="1">
                 <a:solidFill>
                   <a:srgbClr val="1A1A1A"/>
                 </a:solidFill>
                 <a:latin typeface="Lato"/>
               </a:rPr>
-              <a:t>“The LLM margin over the rule baseline should be largest on USES_PRECURSOR and USES_LINKER, and smallest on AT_CONDITION and IN_SOLVENT.”</a:t>
+              <a:t>“The LLM margin should be largest on USES_PRECURSOR, USES_LINKER and SYNTHESIZED_BY, and smallest on AT_CONDITION and IN_SOLVENT.”</a:t>
             </a:r>
           </a:p>
           <a:p>
@@ -7966,13 +10039,13 @@
               </a:spcAft>
             </a:pPr>
             <a:r>
-              <a:rPr sz="1350" b="0" i="0">
+              <a:rPr sz="1300" b="0" i="0">
                 <a:solidFill>
                   <a:srgbClr val="1A1A1A"/>
                 </a:solidFill>
                 <a:latin typeface="Lato"/>
               </a:rPr>
-              <a:t>Measured margins: +0.42, +0.31, +0.25, +0.17. The ordering matches exactly. The prediction was committed to the repository first, so this is a confirmation rather than a pattern found afterwards.</a:t>
+              <a:t>SYNTHESIZED_BY has one gold triple, so it cannot be tested. On the four fields that can: +0.42, +0.31, +0.25, +0.17. Precursor and linker lead, solvent and condition trail, as predicted.</a:t>
             </a:r>
           </a:p>
         </p:txBody>
@@ -8729,7 +10802,7 @@
                 </a:solidFill>
                 <a:latin typeface="Lato"/>
               </a:rPr>
-              <a:t>On dense synthesis text, caution costs more than it buys.</a:t>
+              <a:t>Every prompt says to omit when unsure. Whether gpt-4o is more cautious or simply more obedient, this design cannot tell apart.</a:t>
             </a:r>
           </a:p>
         </p:txBody>
@@ -9060,4 +11133,324 @@
   </a:objectDefaults>
   <a:extraClrSchemeLst/>
 </a:theme>
+</file>
+
+<file path=ppt/theme/theme2.xml><?xml version="1.0" encoding="utf-8"?>
+<a:theme xmlns:a="http://schemas.openxmlformats.org/drawingml/2006/main" name="Office Theme">
+  <a:themeElements>
+    <a:clrScheme name="Office">
+      <a:dk1>
+        <a:sysClr val="windowText" lastClr="000000"/>
+      </a:dk1>
+      <a:lt1>
+        <a:sysClr val="window" lastClr="FFFFFF"/>
+      </a:lt1>
+      <a:dk2>
+        <a:srgbClr val="1F497D"/>
+      </a:dk2>
+      <a:lt2>
+        <a:srgbClr val="EEECE1"/>
+      </a:lt2>
+      <a:accent1>
+        <a:srgbClr val="4F81BD"/>
+      </a:accent1>
+      <a:accent2>
+        <a:srgbClr val="C0504D"/>
+      </a:accent2>
+      <a:accent3>
+        <a:srgbClr val="9BBB59"/>
+      </a:accent3>
+      <a:accent4>
+        <a:srgbClr val="8064A2"/>
+      </a:accent4>
+      <a:accent5>
+        <a:srgbClr val="4BACC6"/>
+      </a:accent5>
+      <a:accent6>
+        <a:srgbClr val="F79646"/>
+      </a:accent6>
+      <a:hlink>
+        <a:srgbClr val="0000FF"/>
+      </a:hlink>
+      <a:folHlink>
+        <a:srgbClr val="800080"/>
+      </a:folHlink>
+    </a:clrScheme>
+    <a:fontScheme name="Office">
+      <a:majorFont>
+        <a:latin typeface="Calibri"/>
+        <a:ea typeface=""/>
+        <a:cs typeface=""/>
+        <a:font script="Jpan" typeface="ＭＳ Ｐゴシック"/>
+        <a:font script="Hang" typeface="맑은 고딕"/>
+        <a:font script="Hans" typeface="宋体"/>
+        <a:font script="Hant" typeface="新細明體"/>
+        <a:font script="Arab" typeface="Times New Roman"/>
+        <a:font script="Hebr" typeface="Times New Roman"/>
+        <a:font script="Thai" typeface="Angsana New"/>
+        <a:font script="Ethi" typeface="Nyala"/>
+        <a:font script="Beng" typeface="Vrinda"/>
+        <a:font script="Gujr" typeface="Shruti"/>
+        <a:font script="Khmr" typeface="MoolBoran"/>
+        <a:font script="Knda" typeface="Tunga"/>
+        <a:font script="Guru" typeface="Raavi"/>
+        <a:font script="Cans" typeface="Euphemia"/>
+        <a:font script="Cher" typeface="Plantagenet Cherokee"/>
+        <a:font script="Yiii" typeface="Microsoft Yi Baiti"/>
+        <a:font script="Tibt" typeface="Microsoft Himalaya"/>
+        <a:font script="Thaa" typeface="MV Boli"/>
+        <a:font script="Deva" typeface="Mangal"/>
+        <a:font script="Telu" typeface="Gautami"/>
+        <a:font script="Taml" typeface="Latha"/>
+        <a:font script="Syrc" typeface="Estrangelo Edessa"/>
+        <a:font script="Orya" typeface="Kalinga"/>
+        <a:font script="Mlym" typeface="Kartika"/>
+        <a:font script="Laoo" typeface="DokChampa"/>
+        <a:font script="Sinh" typeface="Iskoola Pota"/>
+        <a:font script="Mong" typeface="Mongolian Baiti"/>
+        <a:font script="Viet" typeface="Times New Roman"/>
+        <a:font script="Uigh" typeface="Microsoft Uighur"/>
+        <a:font script="Geor" typeface="Sylfaen"/>
+      </a:majorFont>
+      <a:minorFont>
+        <a:latin typeface="Calibri"/>
+        <a:ea typeface=""/>
+        <a:cs typeface=""/>
+        <a:font script="Jpan" typeface="ＭＳ Ｐゴシック"/>
+        <a:font script="Hang" typeface="맑은 고딕"/>
+        <a:font script="Hans" typeface="宋体"/>
+        <a:font script="Hant" typeface="新細明體"/>
+        <a:font script="Arab" typeface="Arial"/>
+        <a:font script="Hebr" typeface="Arial"/>
+        <a:font script="Thai" typeface="Cordia New"/>
+        <a:font script="Ethi" typeface="Nyala"/>
+        <a:font script="Beng" typeface="Vrinda"/>
+        <a:font script="Gujr" typeface="Shruti"/>
+        <a:font script="Khmr" typeface="DaunPenh"/>
+        <a:font script="Knda" typeface="Tunga"/>
+        <a:font script="Guru" typeface="Raavi"/>
+        <a:font script="Cans" typeface="Euphemia"/>
+        <a:font script="Cher" typeface="Plantagenet Cherokee"/>
+        <a:font script="Yiii" typeface="Microsoft Yi Baiti"/>
+        <a:font script="Tibt" typeface="Microsoft Himalaya"/>
+        <a:font script="Thaa" typeface="MV Boli"/>
+        <a:font script="Deva" typeface="Mangal"/>
+        <a:font script="Telu" typeface="Gautami"/>
+        <a:font script="Taml" typeface="Latha"/>
+        <a:font script="Syrc" typeface="Estrangelo Edessa"/>
+        <a:font script="Orya" typeface="Kalinga"/>
+        <a:font script="Mlym" typeface="Kartika"/>
+        <a:font script="Laoo" typeface="DokChampa"/>
+        <a:font script="Sinh" typeface="Iskoola Pota"/>
+        <a:font script="Mong" typeface="Mongolian Baiti"/>
+        <a:font script="Viet" typeface="Arial"/>
+        <a:font script="Uigh" typeface="Microsoft Uighur"/>
+        <a:font script="Geor" typeface="Sylfaen"/>
+      </a:minorFont>
+    </a:fontScheme>
+    <a:fmtScheme name="Office">
+      <a:fillStyleLst>
+        <a:solidFill>
+          <a:schemeClr val="phClr"/>
+        </a:solidFill>
+        <a:gradFill rotWithShape="1">
+          <a:gsLst>
+            <a:gs pos="0">
+              <a:schemeClr val="phClr">
+                <a:tint val="50000"/>
+                <a:satMod val="300000"/>
+              </a:schemeClr>
+            </a:gs>
+            <a:gs pos="35000">
+              <a:schemeClr val="phClr">
+                <a:tint val="37000"/>
+                <a:satMod val="300000"/>
+              </a:schemeClr>
+            </a:gs>
+            <a:gs pos="100000">
+              <a:schemeClr val="phClr">
+                <a:tint val="15000"/>
+                <a:satMod val="350000"/>
+              </a:schemeClr>
+            </a:gs>
+          </a:gsLst>
+          <a:lin ang="16200000" scaled="1"/>
+        </a:gradFill>
+        <a:gradFill rotWithShape="1">
+          <a:gsLst>
+            <a:gs pos="0">
+              <a:schemeClr val="phClr">
+                <a:tint val="100000"/>
+                <a:shade val="100000"/>
+                <a:satMod val="130000"/>
+              </a:schemeClr>
+            </a:gs>
+            <a:gs pos="100000">
+              <a:schemeClr val="phClr">
+                <a:tint val="50000"/>
+                <a:shade val="100000"/>
+                <a:satMod val="350000"/>
+              </a:schemeClr>
+            </a:gs>
+          </a:gsLst>
+          <a:lin ang="16200000" scaled="0"/>
+        </a:gradFill>
+      </a:fillStyleLst>
+      <a:lnStyleLst>
+        <a:ln w="9525" cap="flat" cmpd="sng" algn="ctr">
+          <a:solidFill>
+            <a:schemeClr val="phClr">
+              <a:shade val="95000"/>
+              <a:satMod val="105000"/>
+            </a:schemeClr>
+          </a:solidFill>
+          <a:prstDash val="solid"/>
+        </a:ln>
+        <a:ln w="25400" cap="flat" cmpd="sng" algn="ctr">
+          <a:solidFill>
+            <a:schemeClr val="phClr"/>
+          </a:solidFill>
+          <a:prstDash val="solid"/>
+        </a:ln>
+        <a:ln w="38100" cap="flat" cmpd="sng" algn="ctr">
+          <a:solidFill>
+            <a:schemeClr val="phClr"/>
+          </a:solidFill>
+          <a:prstDash val="solid"/>
+        </a:ln>
+      </a:lnStyleLst>
+      <a:effectStyleLst>
+        <a:effectStyle>
+          <a:effectLst>
+            <a:outerShdw blurRad="40000" dist="20000" dir="5400000" rotWithShape="0">
+              <a:srgbClr val="000000">
+                <a:alpha val="38000"/>
+              </a:srgbClr>
+            </a:outerShdw>
+          </a:effectLst>
+        </a:effectStyle>
+        <a:effectStyle>
+          <a:effectLst>
+            <a:outerShdw blurRad="40000" dist="23000" dir="5400000" rotWithShape="0">
+              <a:srgbClr val="000000">
+                <a:alpha val="35000"/>
+              </a:srgbClr>
+            </a:outerShdw>
+          </a:effectLst>
+        </a:effectStyle>
+        <a:effectStyle>
+          <a:effectLst>
+            <a:outerShdw blurRad="40000" dist="23000" dir="5400000" rotWithShape="0">
+              <a:srgbClr val="000000">
+                <a:alpha val="35000"/>
+              </a:srgbClr>
+            </a:outerShdw>
+          </a:effectLst>
+          <a:scene3d>
+            <a:camera prst="orthographicFront">
+              <a:rot lat="0" lon="0" rev="0"/>
+            </a:camera>
+            <a:lightRig rig="threePt" dir="t">
+              <a:rot lat="0" lon="0" rev="1200000"/>
+            </a:lightRig>
+          </a:scene3d>
+          <a:sp3d>
+            <a:bevelT w="63500" h="25400"/>
+          </a:sp3d>
+        </a:effectStyle>
+      </a:effectStyleLst>
+      <a:bgFillStyleLst>
+        <a:solidFill>
+          <a:schemeClr val="phClr"/>
+        </a:solidFill>
+        <a:gradFill rotWithShape="1">
+          <a:gsLst>
+            <a:gs pos="0">
+              <a:schemeClr val="phClr">
+                <a:tint val="40000"/>
+                <a:satMod val="350000"/>
+              </a:schemeClr>
+            </a:gs>
+            <a:gs pos="40000">
+              <a:schemeClr val="phClr">
+                <a:tint val="45000"/>
+                <a:shade val="99000"/>
+                <a:satMod val="350000"/>
+              </a:schemeClr>
+            </a:gs>
+            <a:gs pos="100000">
+              <a:schemeClr val="phClr">
+                <a:shade val="20000"/>
+                <a:satMod val="255000"/>
+              </a:schemeClr>
+            </a:gs>
+          </a:gsLst>
+          <a:path path="circle">
+            <a:fillToRect l="50000" t="-80000" r="50000" b="180000"/>
+          </a:path>
+        </a:gradFill>
+        <a:gradFill rotWithShape="1">
+          <a:gsLst>
+            <a:gs pos="0">
+              <a:schemeClr val="phClr">
+                <a:tint val="80000"/>
+                <a:satMod val="300000"/>
+              </a:schemeClr>
+            </a:gs>
+            <a:gs pos="100000">
+              <a:schemeClr val="phClr">
+                <a:shade val="30000"/>
+                <a:satMod val="200000"/>
+              </a:schemeClr>
+            </a:gs>
+          </a:gsLst>
+          <a:path path="circle">
+            <a:fillToRect l="50000" t="50000" r="50000" b="50000"/>
+          </a:path>
+        </a:gradFill>
+      </a:bgFillStyleLst>
+    </a:fmtScheme>
+  </a:themeElements>
+  <a:objectDefaults>
+    <a:spDef>
+      <a:spPr/>
+      <a:bodyPr/>
+      <a:lstStyle/>
+      <a:style>
+        <a:lnRef idx="1">
+          <a:schemeClr val="accent1"/>
+        </a:lnRef>
+        <a:fillRef idx="3">
+          <a:schemeClr val="accent1"/>
+        </a:fillRef>
+        <a:effectRef idx="2">
+          <a:schemeClr val="accent1"/>
+        </a:effectRef>
+        <a:fontRef idx="minor">
+          <a:schemeClr val="lt1"/>
+        </a:fontRef>
+      </a:style>
+    </a:spDef>
+    <a:lnDef>
+      <a:spPr/>
+      <a:bodyPr/>
+      <a:lstStyle/>
+      <a:style>
+        <a:lnRef idx="2">
+          <a:schemeClr val="accent1"/>
+        </a:lnRef>
+        <a:fillRef idx="0">
+          <a:schemeClr val="accent1"/>
+        </a:fillRef>
+        <a:effectRef idx="1">
+          <a:schemeClr val="accent1"/>
+        </a:effectRef>
+        <a:fontRef idx="minor">
+          <a:schemeClr val="tx1"/>
+        </a:fontRef>
+      </a:style>
+    </a:lnDef>
+  </a:objectDefaults>
+  <a:extraClrSchemeLst/>
+</a:theme>
 </file>
--- a/presentation/Case_Study_2_Final_Presentation.pptx
+++ b/presentation/Case_Study_2_Final_Presentation.pptx
@@ -514,45 +514,34 @@
           <a:lstStyle/>
           <a:p>
             <a:r>
-              <a:t>Time: 0:30</a:t>
-            </a:r>
-          </a:p>
-          <a:p>
-            <a:r>
-              <a:t>Remember: I measured how accurately language models read chemistry papers, and what it costs.</a:t>
+              <a:t>Time: 0:25</a:t>
+            </a:r>
+          </a:p>
+          <a:p>
+            <a:r>
+              <a:t>Remember: How well can AI read a chemistry paper, and what does it cost.</a:t>
             </a:r>
           </a:p>
           <a:p/>
           <a:p>
             <a:r>
-              <a:t>Good morning. My name is Devendra Singh Dhakad, and this is my Case Study 2, supervised by</a:t>
-            </a:r>
-          </a:p>
-          <a:p>
-            <a:r>
-              <a:t>Professor Jalali.</a:t>
+              <a:t>Good morning. I'm Devendra Singh Dhakad, and this is my Case Study 2, supervised by Professor</a:t>
+            </a:r>
+          </a:p>
+          <a:p>
+            <a:r>
+              <a:t>Jalali.</a:t>
             </a:r>
           </a:p>
           <a:p/>
           <a:p>
             <a:r>
-              <a:t>The title is Building and Validating a Metal–Organic Framework Synthesis Knowledge Graph with</a:t>
-            </a:r>
-          </a:p>
-          <a:p>
-            <a:r>
-              <a:t>Large Language Models.</a:t>
-            </a:r>
-          </a:p>
-          <a:p/>
-          <a:p>
-            <a:r>
-              <a:t>In one sentence: I measured how accurately AI language models can read chemistry papers and pull</a:t>
-            </a:r>
-          </a:p>
-          <a:p>
-            <a:r>
-              <a:t>out how a material was made, and what that accuracy costs.</a:t>
+              <a:t>The question I set out to answer is easy to say. How accurately can an AI read a chemistry paper</a:t>
+            </a:r>
+          </a:p>
+          <a:p>
+            <a:r>
+              <a:t>and pull out how the material was made? And what does that accuracy cost?</a:t>
             </a:r>
           </a:p>
         </p:txBody>
@@ -622,61 +611,55 @@
           <a:lstStyle/>
           <a:p>
             <a:r>
-              <a:t>Time: 1:15</a:t>
-            </a:r>
-          </a:p>
-          <a:p>
-            <a:r>
-              <a:t>Remember: It is not a dictionary problem, it is a linking problem.</a:t>
+              <a:t>Time: 1:00</a:t>
+            </a:r>
+          </a:p>
+          <a:p>
+            <a:r>
+              <a:t>Remember: Not a dictionary problem. A linking problem.</a:t>
             </a:r>
           </a:p>
           <a:p/>
           <a:p>
             <a:r>
-              <a:t>So why does the rule baseline do so badly?</a:t>
+              <a:t>So why is the rule baseline so bad?</a:t>
             </a:r>
           </a:p>
           <a:p/>
           <a:p>
             <a:r>
-              <a:t>[point to the chart] It identifies which MOF a passage is about in only 121 of 794 passages,</a:t>
-            </a:r>
-          </a:p>
-          <a:p>
-            <a:r>
-              <a:t>about 15 percent. And five of the eight relations have the MOF as their subject, so when the MOF</a:t>
-            </a:r>
-          </a:p>
-          <a:p>
-            <a:r>
-              <a:t>is missing, most of the recipe cannot be extracted at all.</a:t>
+              <a:t>[point to the chart] It works out which MOF the passage is about only 121 times out of 794.</a:t>
+            </a:r>
+          </a:p>
+          <a:p>
+            <a:r>
+              <a:t>Fifteen percent. And five of my eight relations need the MOF, so when that's missing, most of</a:t>
+            </a:r>
+          </a:p>
+          <a:p>
+            <a:r>
+              <a:t>the recipe goes with it.</a:t>
             </a:r>
           </a:p>
           <a:p/>
           <a:p>
             <a:r>
-              <a:t>The interesting part is why. In 331 passages, the MOF is named somewhere else in the paper. In</a:t>
-            </a:r>
-          </a:p>
-          <a:p>
-            <a:r>
-              <a:t>251, it is called something like "compound 1", which is defined in a table. Neither of those is</a:t>
-            </a:r>
-          </a:p>
-          <a:p>
-            <a:r>
-              <a:t>a missing word in a dictionary.</a:t>
-            </a:r>
-          </a:p>
-          <a:p/>
-          <a:p>
-            <a:r>
-              <a:t>So for anyone maintaining a rule-based system, the fix is linking across the paper and reading</a:t>
-            </a:r>
-          </a:p>
-          <a:p>
-            <a:r>
-              <a:t>tables, not a bigger dictionary.</a:t>
+              <a:t>The why is the interesting part. In 331 cases the MOF is named somewhere else in the paper. In</a:t>
+            </a:r>
+          </a:p>
+          <a:p>
+            <a:r>
+              <a:t>251 it's called something like "compound 1", and defined in a table. Neither of those is a</a:t>
+            </a:r>
+          </a:p>
+          <a:p>
+            <a:r>
+              <a:t>missing word in a dictionary. So if you maintain one of these systems, the fix is linking across</a:t>
+            </a:r>
+          </a:p>
+          <a:p>
+            <a:r>
+              <a:t>the paper and reading tables, not a bigger dictionary.</a:t>
             </a:r>
           </a:p>
         </p:txBody>
@@ -746,66 +729,46 @@
           <a:lstStyle/>
           <a:p>
             <a:r>
-              <a:t>Time: 1:00 *(can shorten)*</a:t>
-            </a:r>
-          </a:p>
-          <a:p>
-            <a:r>
-              <a:t>Remember: Every fact traces back to its paper, and I checked that with a query.</a:t>
+              <a:t>Time: 0:50 *(can cut)*</a:t>
+            </a:r>
+          </a:p>
+          <a:p>
+            <a:r>
+              <a:t>Remember: Every fact traces back to its paper, and I check that with a query.</a:t>
             </a:r>
           </a:p>
           <a:p/>
           <a:p>
             <a:r>
-              <a:t>RQ5, the knowledge graph. Built from the rule-based extractions over all 794 passages, it has</a:t>
-            </a:r>
-          </a:p>
-          <a:p>
-            <a:r>
-              <a:t>485 distinct nodes and 2,429 relationships, across 182 papers.</a:t>
+              <a:t>The knowledge graph. 485 nodes, 2,429 relationships, across 182 papers.</a:t>
             </a:r>
           </a:p>
           <a:p/>
           <a:p>
             <a:r>
-              <a:t>Every entity has a MENTIONED_IN edge back to its source paper. I verify that with a query that</a:t>
-            </a:r>
-          </a:p>
-          <a:p>
-            <a:r>
-              <a:t>looks for any entity without one, and it returns zero rows. So provenance is checked, not just</a:t>
-            </a:r>
-          </a:p>
-          <a:p>
-            <a:r>
-              <a:t>claimed.</a:t>
+              <a:t>Every entity links back to the paper it came from. And I don't just claim that, I check it.</a:t>
+            </a:r>
+          </a:p>
+          <a:p>
+            <a:r>
+              <a:t>There's a query that looks for any entity without that link, and it comes back empty.</a:t>
             </a:r>
           </a:p>
           <a:p/>
           <a:p>
             <a:r>
-              <a:t>The graph can answer questions across papers. For example, solvothermal synthesis appears in 61</a:t>
-            </a:r>
-          </a:p>
-          <a:p>
-            <a:r>
-              <a:t>papers, covering 30 MOFs.</a:t>
+              <a:t>It answers questions across papers too. Solvothermal shows up in 61 papers, covering 30 MOFs.</a:t>
             </a:r>
           </a:p>
           <a:p/>
           <a:p>
             <a:r>
-              <a:t>[point to the box] One open question. DigiMOF found more hydrothermal than solvothermal records,</a:t>
-            </a:r>
-          </a:p>
-          <a:p>
-            <a:r>
-              <a:t>and called that surprising. My corpus shows the opposite. I record that; I do not claim to</a:t>
-            </a:r>
-          </a:p>
-          <a:p>
-            <a:r>
-              <a:t>explain it.</a:t>
+              <a:t>[point to the box] One thing I can't explain. DigiMOF found more hydrothermal than solvothermal</a:t>
+            </a:r>
+          </a:p>
+          <a:p>
+            <a:r>
+              <a:t>and called that surprising. I get the opposite. I'm recording it, not explaining it.</a:t>
             </a:r>
           </a:p>
         </p:txBody>
@@ -875,83 +838,73 @@
           <a:lstStyle/>
           <a:p>
             <a:r>
-              <a:t>Time: 1:30</a:t>
-            </a:r>
-          </a:p>
-          <a:p>
-            <a:r>
-              <a:t>Remember: Undetermined is not the same as zero.</a:t>
+              <a:t>Time: 1:15</a:t>
+            </a:r>
+          </a:p>
+          <a:p>
+            <a:r>
+              <a:t>Remember: Undetermined isn't the same as zero.</a:t>
             </a:r>
           </a:p>
           <a:p/>
           <a:p>
             <a:r>
-              <a:t>This slide is what the study cannot show, and I want to be direct about it.</a:t>
+              <a:t>Now what this doesn't show. I want to be direct about it.</a:t>
             </a:r>
           </a:p>
           <a:p/>
           <a:p>
             <a:r>
-              <a:t>RQ3 is not answered. DigiMOF and SynMOF identify each material by a CSD refcode. My corpus uses</a:t>
-            </a:r>
-          </a:p>
-          <a:p>
-            <a:r>
-              <a:t>DOIs and the names written in the papers. Joining the two needs a licensed mapping that I did not</a:t>
-            </a:r>
-          </a:p>
-          <a:p>
-            <a:r>
-              <a:t>have. So the overlap is undetermined, and that is not the same as zero. What I could measure is</a:t>
-            </a:r>
-          </a:p>
-          <a:p>
-            <a:r>
-              <a:t>that the two databases agree with each other on the metal 98.9 percent of the time, across the</a:t>
-            </a:r>
-          </a:p>
-          <a:p>
-            <a:r>
-              <a:t>509 MOFs they share.</a:t>
+              <a:t>RQ3 isn't answered. The reference databases identify each material by a CSD refcode. I use DOIs</a:t>
+            </a:r>
+          </a:p>
+          <a:p>
+            <a:r>
+              <a:t>and the names written in the papers. Joining them needs a licensed mapping I don't have. So the</a:t>
+            </a:r>
+          </a:p>
+          <a:p>
+            <a:r>
+              <a:t>overlap is undetermined, and that isn't the same as zero. What I could measure is that those two</a:t>
+            </a:r>
+          </a:p>
+          <a:p>
+            <a:r>
+              <a:t>databases agree with each other 98.9 percent of the time, on the 509 MOFs they share.</a:t>
             </a:r>
           </a:p>
           <a:p/>
           <a:p>
             <a:r>
-              <a:t>The best F1, 0.364, is below the 0.80 I targeted in the exposé. Part of that is strict text</a:t>
-            </a:r>
-          </a:p>
-          <a:p>
-            <a:r>
-              <a:t>matching: a correct answer written differently counts as wrong. So 0.364 is a lower bound.</a:t>
+              <a:t>My best score, 0.364, is below the 0.80 I aimed for. Some of that is strict text matching, where</a:t>
+            </a:r>
+          </a:p>
+          <a:p>
+            <a:r>
+              <a:t>a right answer spelled differently counts as wrong.</a:t>
             </a:r>
           </a:p>
           <a:p/>
           <a:p>
             <a:r>
-              <a:t>The gold standard is 100 passages with one annotator, so I cannot compute agreement between</a:t>
-            </a:r>
-          </a:p>
-          <a:p>
-            <a:r>
-              <a:t>annotators.</a:t>
+              <a:t>One annotator and 100 passages, so I can't report agreement between annotators.</a:t>
             </a:r>
           </a:p>
           <a:p/>
           <a:p>
             <a:r>
-              <a:t>Two open-weight runs hit a daily free-tier limit, and I deleted them rather than score them,</a:t>
-            </a:r>
-          </a:p>
-          <a:p>
-            <a:r>
-              <a:t>because a half-finished run makes a rate-limited model look like a bad model.</a:t>
+              <a:t>Two runs hit a free-tier daily limit, and I deleted them rather than score them, because a</a:t>
+            </a:r>
+          </a:p>
+          <a:p>
+            <a:r>
+              <a:t>half-finished run makes a rate-limited model look like a bad one.</a:t>
             </a:r>
           </a:p>
           <a:p/>
           <a:p>
             <a:r>
-              <a:t>And every configuration ran once, so there is no estimate of variance.</a:t>
+              <a:t>And everything ran once, so I have no variance.</a:t>
             </a:r>
           </a:p>
         </p:txBody>
@@ -1026,61 +979,51 @@
           </a:p>
           <a:p>
             <a:r>
-              <a:t>Remember: Beat the rules, predicted where, measured what the cheap one does better.</a:t>
+              <a:t>Remember: Beat the rules, called it in advance, measured what the cheap one does better.</a:t>
             </a:r>
           </a:p>
           <a:p/>
           <a:p>
             <a:r>
-              <a:t>To conclude.</a:t>
+              <a:t>To finish.</a:t>
             </a:r>
           </a:p>
           <a:p/>
           <a:p>
             <a:r>
-              <a:t>Language models beat the rule baseline in every configuration, and the testable part of my</a:t>
-            </a:r>
-          </a:p>
-          <a:p>
-            <a:r>
-              <a:t>pre-registered prediction held. The cheaper model won because the larger one extracts less.</a:t>
-            </a:r>
-          </a:p>
-          <a:p>
-            <a:r>
-              <a:t>That is measured; why it extracts less is not yet. On the like-for-like zero-shot comparison, a free open-weight model reached about</a:t>
-            </a:r>
-          </a:p>
-          <a:p>
-            <a:r>
-              <a:t>two thirds of the commercial score. And the knowledge graph is provenance-complete, verified by</a:t>
-            </a:r>
-          </a:p>
-          <a:p>
-            <a:r>
-              <a:t>query.</a:t>
+              <a:t>Language models beat the rule baseline every time, and the testable part of my prediction held.</a:t>
+            </a:r>
+          </a:p>
+          <a:p>
+            <a:r>
+              <a:t>The cheap model won because the bigger one extracts less. That part is measured. Why it does,</a:t>
+            </a:r>
+          </a:p>
+          <a:p>
+            <a:r>
+              <a:t>I don't know yet. On the like-for-like comparison the free model got about two thirds of the</a:t>
+            </a:r>
+          </a:p>
+          <a:p>
+            <a:r>
+              <a:t>commercial score. And the graph traces every fact back to its paper.</a:t>
             </a:r>
           </a:p>
           <a:p/>
           <a:p>
             <a:r>
-              <a:t>For future work: obtain a refcode mapping and close RQ3, rerun both models without the</a:t>
-            </a:r>
-          </a:p>
-          <a:p>
-            <a:r>
-              <a:t>"omit when unsure" instruction to separate caution from obedience, repair the condition</a:t>
-            </a:r>
-          </a:p>
-          <a:p>
-            <a:r>
-              <a:t>evaluation, and add a second annotator.</a:t>
+              <a:t>Next steps: get the refcode mapping and close RQ3, rerun both models without the "omit when</a:t>
+            </a:r>
+          </a:p>
+          <a:p>
+            <a:r>
+              <a:t>unsure" line, fix the condition scoring, and add a second annotator.</a:t>
             </a:r>
           </a:p>
           <a:p/>
           <a:p>
             <a:r>
-              <a:t>Thank you. I am happy to take your questions.</a:t>
+              <a:t>Thank you. I'm happy to take questions.</a:t>
             </a:r>
           </a:p>
         </p:txBody>
@@ -1150,82 +1093,65 @@
           <a:lstStyle/>
           <a:p>
             <a:r>
-              <a:t>Time: 1:15</a:t>
-            </a:r>
-          </a:p>
-          <a:p>
-            <a:r>
-              <a:t>Remember: The recipes exist, but only as sentences in papers.</a:t>
+              <a:t>Time: 1:05</a:t>
+            </a:r>
+          </a:p>
+          <a:p>
+            <a:r>
+              <a:t>Remember: The recipes exist. They're just sentences in papers.</a:t>
             </a:r>
           </a:p>
           <a:p/>
           <a:p>
             <a:r>
-              <a:t>First, the problem.</a:t>
+              <a:t>So, MOFs. They're crystals built from metal nodes joined by organic linkers, and inside they're</a:t>
+            </a:r>
+          </a:p>
+          <a:p>
+            <a:r>
+              <a:t>mostly empty space. That's what makes them useful, for capturing CO2, storing gas, catalysis,</a:t>
+            </a:r>
+          </a:p>
+          <a:p>
+            <a:r>
+              <a:t>drug delivery. Over a hundred thousand of them are in the Cambridge database.</a:t>
             </a:r>
           </a:p>
           <a:p/>
           <a:p>
             <a:r>
-              <a:t>Metal–organic frameworks, or MOFs, are crystals built from metal nodes connected by organic</a:t>
-            </a:r>
-          </a:p>
-          <a:p>
-            <a:r>
-              <a:t>linkers. Inside they are mostly empty space, and that is what makes them useful: capturing</a:t>
-            </a:r>
-          </a:p>
-          <a:p>
-            <a:r>
-              <a:t>carbon dioxide, storing gas, catalysis, drug delivery. More than a hundred thousand of them are</a:t>
-            </a:r>
-          </a:p>
-          <a:p>
-            <a:r>
-              <a:t>recorded in the Cambridge Structural Database.</a:t>
+              <a:t>Every one was made by following a recipe. A metal precursor, a linker, a solvent, a temperature,</a:t>
+            </a:r>
+          </a:p>
+          <a:p>
+            <a:r>
+              <a:t>a time. But those recipes are just sentences, sitting inside thousands of papers. Nobody has</a:t>
+            </a:r>
+          </a:p>
+          <a:p>
+            <a:r>
+              <a:t>them as data.</a:t>
             </a:r>
           </a:p>
           <a:p/>
           <a:p>
             <a:r>
-              <a:t>Every one was made by following a recipe: a metal precursor, a linker, a solvent, a method, a</a:t>
-            </a:r>
-          </a:p>
-          <a:p>
-            <a:r>
-              <a:t>temperature and a time. But those recipes are written as sentences, inside tens of thousands of</a:t>
-            </a:r>
-          </a:p>
-          <a:p>
-            <a:r>
-              <a:t>papers. There is no complete structured table of them.</a:t>
-            </a:r>
-          </a:p>
-          <a:p/>
-          <a:p>
-            <a:r>
-              <a:t>The databases that do exist, like DigiMOF, were built with rule-based text mining. And their own</a:t>
-            </a:r>
-          </a:p>
-          <a:p>
-            <a:r>
-              <a:t>authors wrote that routes a paper only implies are hard for rules to extract.</a:t>
-            </a:r>
-          </a:p>
-          <a:p/>
-          <a:p>
-            <a:r>
-              <a:t>[point to the box] So the gap is this. Nobody had measured language-model extraction of MOF</a:t>
-            </a:r>
-          </a:p>
-          <a:p>
-            <a:r>
-              <a:t>recipes field by field, against both a human answer key and a rule-based baseline, and reported</a:t>
-            </a:r>
-          </a:p>
-          <a:p>
-            <a:r>
-              <a:t>the cost.</a:t>
+              <a:t>[point to the box] The databases that do exist were built with rule-based text mining, and their</a:t>
+            </a:r>
+          </a:p>
+          <a:p>
+            <a:r>
+              <a:t>own authors say the hard cases are the routes a paper only hints at. What nobody had done is</a:t>
+            </a:r>
+          </a:p>
+          <a:p>
+            <a:r>
+              <a:t>measure how well an AI does this, field by field, against a human answer key, and report what</a:t>
+            </a:r>
+          </a:p>
+          <a:p>
+            <a:r>
+              <a:t>it costs.</a:t>
             </a:r>
           </a:p>
         </p:txBody>
@@ -1295,7 +1221,7 @@
           <a:lstStyle/>
           <a:p>
             <a:r>
-              <a:t>Time: 1:00 *(can shorten)*</a:t>
+              <a:t>Time: 0:45 *(can cut)*</a:t>
             </a:r>
           </a:p>
           <a:p>
@@ -1306,53 +1232,39 @@
           <a:p/>
           <a:p>
             <a:r>
-              <a:t>That gives five research questions.</a:t>
+              <a:t>That gave me five questions.</a:t>
             </a:r>
           </a:p>
           <a:p/>
           <a:p>
             <a:r>
-              <a:t>RQ1: field by field, how do language models compare with a rule-based baseline built from the</a:t>
-            </a:r>
-          </a:p>
-          <a:p>
-            <a:r>
-              <a:t>same vocabulary?</a:t>
+              <a:t>How do language models compare with a rule-based baseline, field by field. Which way of asking</a:t>
+            </a:r>
+          </a:p>
+          <a:p>
+            <a:r>
+              <a:t>works best. Where do my extractions disagree with the DigiMOF and SynMOF databases. How does a</a:t>
+            </a:r>
+          </a:p>
+          <a:p>
+            <a:r>
+              <a:t>free open-weight model compare with the paid ones. And can the knowledge graph answer questions</a:t>
+            </a:r>
+          </a:p>
+          <a:p>
+            <a:r>
+              <a:t>across hundreds of papers.</a:t>
             </a:r>
           </a:p>
           <a:p/>
           <a:p>
             <a:r>
-              <a:t>RQ2: which of four prompting strategies works best?</a:t>
-            </a:r>
-          </a:p>
-          <a:p/>
-          <a:p>
-            <a:r>
-              <a:t>RQ3: where do the extractions disagree with DigiMOF and SynMOF?</a:t>
-            </a:r>
-          </a:p>
-          <a:p/>
-          <a:p>
-            <a:r>
-              <a:t>RQ4: open-weight models against commercial ones, on accuracy, cost and latency.</a:t>
-            </a:r>
-          </a:p>
-          <a:p/>
-          <a:p>
-            <a:r>
-              <a:t>And RQ5: can the knowledge graph answer questions across hundreds of papers?</a:t>
-            </a:r>
-          </a:p>
-          <a:p/>
-          <a:p>
-            <a:r>
-              <a:t>I answered four of the five. RQ3 I could not answer, and I will explain exactly why near the</a:t>
-            </a:r>
-          </a:p>
-          <a:p>
-            <a:r>
-              <a:t>end, because I think the reason is a finding in itself.</a:t>
+              <a:t>I answered four of them. The third I couldn't, and I'll come back to why, because I think the</a:t>
+            </a:r>
+          </a:p>
+          <a:p>
+            <a:r>
+              <a:t>reason is worth hearing.</a:t>
             </a:r>
           </a:p>
         </p:txBody>
@@ -1422,87 +1334,61 @@
           <a:lstStyle/>
           <a:p>
             <a:r>
-              <a:t>Time: 1:30</a:t>
-            </a:r>
-          </a:p>
-          <a:p>
-            <a:r>
-              <a:t>Remember: Every extractor has the same interface, so the comparison is fair.</a:t>
+              <a:t>Time: 1:10</a:t>
+            </a:r>
+          </a:p>
+          <a:p>
+            <a:r>
+              <a:t>Remember: Same interface for every extractor, so the comparison is fair.</a:t>
             </a:r>
           </a:p>
           <a:p/>
           <a:p>
             <a:r>
-              <a:t>This is the pipeline.</a:t>
+              <a:t>Here's the pipeline.</a:t>
             </a:r>
           </a:p>
           <a:p/>
           <a:p>
             <a:r>
-              <a:t>[start at the top left] I collected 399 open-access papers from Europe PMC, with their sections</a:t>
-            </a:r>
-          </a:p>
-          <a:p>
-            <a:r>
-              <a:t>already labelled. The segmentation step cut them into 22,086 passages and scored each one on how</a:t>
-            </a:r>
-          </a:p>
-          <a:p>
-            <a:r>
-              <a:t>much it looks like a synthesis procedure. 794 passed the threshold.</a:t>
+              <a:t>[top left] I pulled 399 open-access papers from Europe PMC. Cut them into 22,086 paragraphs, and</a:t>
+            </a:r>
+          </a:p>
+          <a:p>
+            <a:r>
+              <a:t>scored each one on how much it looks like a recipe. 794 passed.</a:t>
             </a:r>
           </a:p>
           <a:p/>
           <a:p>
             <a:r>
-              <a:t>[point to Extraction] Then extraction. The rule-based baseline and the language models sit</a:t>
-            </a:r>
-          </a:p>
-          <a:p>
-            <a:r>
-              <a:t>inside one stage, because they all implement the same interface and return exactly the same</a:t>
-            </a:r>
-          </a:p>
-          <a:p>
-            <a:r>
-              <a:t>output shape. That is the design decision that makes the comparison fair: every extractor is</a:t>
-            </a:r>
-          </a:p>
-          <a:p>
-            <a:r>
-              <a:t>scored on identical terms.</a:t>
+              <a:t>[Extraction] Then extraction. The rule-based baseline and the language models sit in the same</a:t>
+            </a:r>
+          </a:p>
+          <a:p>
+            <a:r>
+              <a:t>box, because they all implement one interface and return the same shape. That's the thing that</a:t>
+            </a:r>
+          </a:p>
+          <a:p>
+            <a:r>
+              <a:t>makes the comparison fair.</a:t>
             </a:r>
           </a:p>
           <a:p/>
           <a:p>
             <a:r>
-              <a:t>[point to the orange boxes] Notice that every stage writes a file to disk, and the next stage</a:t>
-            </a:r>
-          </a:p>
-          <a:p>
-            <a:r>
-              <a:t>reads it. So I can rerun any single stage without rerunning the rest, and every intermediate</a:t>
-            </a:r>
-          </a:p>
-          <a:p>
-            <a:r>
-              <a:t>result can be opened and checked. Every language-model response is also cached, so I never paid</a:t>
-            </a:r>
-          </a:p>
-          <a:p>
-            <a:r>
-              <a:t>twice for the same call.</a:t>
-            </a:r>
-          </a:p>
-          <a:p/>
-          <a:p>
-            <a:r>
-              <a:t>[point to the green boxes] At the end, the results go to evaluation, and into a Neo4j knowledge</a:t>
-            </a:r>
-          </a:p>
-          <a:p>
-            <a:r>
-              <a:t>graph.</a:t>
+              <a:t>[orange boxes] And every stage writes a file that the next stage reads. So I can rerun one stage</a:t>
+            </a:r>
+          </a:p>
+          <a:p>
+            <a:r>
+              <a:t>without the others, and I can open any intermediate result and check it. Every model response is</a:t>
+            </a:r>
+          </a:p>
+          <a:p>
+            <a:r>
+              <a:t>cached too, so I never paid twice for the same call.</a:t>
             </a:r>
           </a:p>
         </p:txBody>
@@ -1572,56 +1458,51 @@
           <a:lstStyle/>
           <a:p>
             <a:r>
-              <a:t>Time: 1:15</a:t>
-            </a:r>
-          </a:p>
-          <a:p>
-            <a:r>
-              <a:t>Remember: The answer key was made by hand, because a model-made one would be circular.</a:t>
+              <a:t>Time: 1:00</a:t>
+            </a:r>
+          </a:p>
+          <a:p>
+            <a:r>
+              <a:t>Remember: Made by hand, because a model-made answer key would be circular.</a:t>
             </a:r>
           </a:p>
           <a:p/>
           <a:p>
             <a:r>
-              <a:t>The most important part of the whole project is this one: the gold standard, the answer key.</a:t>
+              <a:t>This slide is the one that matters most. The gold standard. The answer key.</a:t>
             </a:r>
           </a:p>
           <a:p/>
           <a:p>
             <a:r>
-              <a:t>I annotated 100 passages by hand, which gave 138 facts, or triples.</a:t>
+              <a:t>I annotated 100 passages by hand, and that gave me 138 facts.</a:t>
             </a:r>
           </a:p>
           <a:p/>
           <a:p>
             <a:r>
-              <a:t>The sample was stratified with a fixed seed: 90 passages the filter had flagged as synthesis,</a:t>
-            </a:r>
-          </a:p>
-          <a:p>
-            <a:r>
-              <a:t>and 10 it had not. Those 10 controls let me measure how often the filter itself misses a recipe,</a:t>
-            </a:r>
-          </a:p>
-          <a:p>
-            <a:r>
-              <a:t>instead of simply assuming it works.</a:t>
+              <a:t>90 of them the filter had flagged as synthesis, 10 it hadn't. Those 10 are controls. They tell</a:t>
+            </a:r>
+          </a:p>
+          <a:p>
+            <a:r>
+              <a:t>me whether my filter is missing recipes, instead of me just assuming it isn't.</a:t>
             </a:r>
           </a:p>
           <a:p/>
           <a:p>
             <a:r>
-              <a:t>[point to the box] And I deliberately did not let any model pre-fill it. The gold standard is</a:t>
-            </a:r>
-          </a:p>
-          <a:p>
-            <a:r>
-              <a:t>the ruler every model is measured against. If a language model had written it, the evaluation</a:t>
-            </a:r>
-          </a:p>
-          <a:p>
-            <a:r>
-              <a:t>would be circular: any mistake the models share would be counted as correct.</a:t>
+              <a:t>[point to the box] And no model touched it. That was deliberate. This is the ruler I measure</a:t>
+            </a:r>
+          </a:p>
+          <a:p>
+            <a:r>
+              <a:t>every model against. If an AI had written it, any mistake the models share would count as</a:t>
+            </a:r>
+          </a:p>
+          <a:p>
+            <a:r>
+              <a:t>correct, and the whole evaluation would be circular.</a:t>
             </a:r>
           </a:p>
         </p:txBody>
@@ -1691,61 +1572,55 @@
           <a:lstStyle/>
           <a:p>
             <a:r>
-              <a:t>Time: 1:15</a:t>
-            </a:r>
-          </a:p>
-          <a:p>
-            <a:r>
-              <a:t>Remember: Provenance is added by the pipeline, so it cannot be hallucinated.</a:t>
+              <a:t>Time: 1:00</a:t>
+            </a:r>
+          </a:p>
+          <a:p>
+            <a:r>
+              <a:t>Remember: Provenance is added by the pipeline, so it can't be hallucinated.</a:t>
             </a:r>
           </a:p>
           <a:p/>
           <a:p>
             <a:r>
-              <a:t>This is the ontology: the schema of what gets extracted. Nine entity types and nine relations,</a:t>
-            </a:r>
-          </a:p>
-          <a:p>
-            <a:r>
-              <a:t>with the MOF at the centre.</a:t>
+              <a:t>This is the ontology. Nine entity types, nine relations, the MOF in the middle.</a:t>
             </a:r>
           </a:p>
           <a:p/>
           <a:p>
             <a:r>
-              <a:t>Two details matter. [point] Solvent and Condition attach to the SynthesisMethod, not directly to</a:t>
-            </a:r>
-          </a:p>
-          <a:p>
-            <a:r>
-              <a:t>the MOF. And MENTIONED_IN, the link back to the source paper, is added by the pipeline and never</a:t>
-            </a:r>
-          </a:p>
-          <a:p>
-            <a:r>
-              <a:t>by a model, so provenance cannot be hallucinated.</a:t>
+              <a:t>Two things to notice. [point] Solvent and condition hang off the synthesis method, not off the</a:t>
+            </a:r>
+          </a:p>
+          <a:p>
+            <a:r>
+              <a:t>MOF. And MENTIONED_IN, the link back to the paper, is added by my pipeline and never by a model.</a:t>
+            </a:r>
+          </a:p>
+          <a:p>
+            <a:r>
+              <a:t>So provenance can't be hallucinated.</a:t>
             </a:r>
           </a:p>
           <a:p/>
           <a:p>
             <a:r>
-              <a:t>Matching is done per passage and per relation, one to one, so no answer can be credited twice.</a:t>
-            </a:r>
-          </a:p>
-          <a:p/>
-          <a:p>
-            <a:r>
-              <a:t>And one thing I declare openly. My annotation tool had a bug: it kept the MOF name in the</a:t>
-            </a:r>
-          </a:p>
-          <a:p>
-            <a:r>
-              <a:t>subject field of the solvent and condition triples. Rather than let a model rewrite the gold</a:t>
-            </a:r>
-          </a:p>
-          <a:p>
-            <a:r>
-              <a:t>standard, I scored those two relations on the object only, and the report says so.</a:t>
+              <a:t>I should also be upfront about one thing. My annotation tool had a bug. It left the MOF name in</a:t>
+            </a:r>
+          </a:p>
+          <a:p>
+            <a:r>
+              <a:t>the subject field for solvent and condition. I could have had a model clean that up, but that</a:t>
+            </a:r>
+          </a:p>
+          <a:p>
+            <a:r>
+              <a:t>would contaminate my ruler. So instead I score those two relations on the object only, and I say</a:t>
+            </a:r>
+          </a:p>
+          <a:p>
+            <a:r>
+              <a:t>so in the report.</a:t>
             </a:r>
           </a:p>
         </p:txBody>
@@ -1815,55 +1690,45 @@
           <a:lstStyle/>
           <a:p>
             <a:r>
-              <a:t>Time: 1:00</a:t>
-            </a:r>
-          </a:p>
-          <a:p>
-            <a:r>
-              <a:t>Remember: Every model beat the rules, and the best one was also one of the cheapest.</a:t>
+              <a:t>Time: 0:50</a:t>
+            </a:r>
+          </a:p>
+          <a:p>
+            <a:r>
+              <a:t>Remember: Everything beat the rules, and the best was also nearly the cheapest.</a:t>
             </a:r>
           </a:p>
           <a:p/>
           <a:p>
             <a:r>
-              <a:t>Now the results. Ten configurations: the rule baseline, two commercial models, gpt-4o and</a:t>
-            </a:r>
-          </a:p>
-          <a:p>
-            <a:r>
-              <a:t>gpt-4o-mini, and one open-weight model, with different prompting strategies. The complete set of</a:t>
-            </a:r>
-          </a:p>
-          <a:p>
-            <a:r>
-              <a:t>experiments cost an estimated 3.06 US dollars, calculated from the recorded token counts at the</a:t>
-            </a:r>
-          </a:p>
-          <a:p>
-            <a:r>
-              <a:t>providers' published prices.</a:t>
+              <a:t>Now the results. Ten configurations. The rule baseline, gpt-4o, gpt-4o-mini, and one free</a:t>
+            </a:r>
+          </a:p>
+          <a:p>
+            <a:r>
+              <a:t>open-weight model, across different prompting strategies. The whole thing cost about three</a:t>
+            </a:r>
+          </a:p>
+          <a:p>
+            <a:r>
+              <a:t>dollars, and I should say that's an estimate from token counts, not an invoice.</a:t>
             </a:r>
           </a:p>
           <a:p/>
           <a:p>
             <a:r>
-              <a:t>[point to the chart] Cost runs along the bottom, accuracy up the side, measured as F1.</a:t>
+              <a:t>[point to the chart] Cost along the bottom, accuracy up the side.</a:t>
             </a:r>
           </a:p>
           <a:p/>
           <a:p>
             <a:r>
-              <a:t>Two things stand out. Every language-model configuration beats the rule baseline: the weakest</a:t>
-            </a:r>
-          </a:p>
-          <a:p>
-            <a:r>
-              <a:t>scores 0.191, the baseline 0.112. And the best configuration, here at the top left, is also one</a:t>
-            </a:r>
-          </a:p>
-          <a:p>
-            <a:r>
-              <a:t>of the cheapest.</a:t>
+              <a:t>Two things stand out. Every language model beats the baseline. And the best one sits at the top</a:t>
+            </a:r>
+          </a:p>
+          <a:p>
+            <a:r>
+              <a:t>left, so it's also one of the cheapest.</a:t>
             </a:r>
           </a:p>
         </p:txBody>
@@ -1933,86 +1798,60 @@
           <a:lstStyle/>
           <a:p>
             <a:r>
-              <a:t>Time: 1:30</a:t>
-            </a:r>
-          </a:p>
-          <a:p>
-            <a:r>
-              <a:t>Remember: I predicted it in advance; the part that can be tested held.</a:t>
+              <a:t>Time: 1:10</a:t>
+            </a:r>
+          </a:p>
+          <a:p>
+            <a:r>
+              <a:t>Remember: I wrote it down first, and the testable part held.</a:t>
             </a:r>
           </a:p>
           <a:p/>
           <a:p>
             <a:r>
-              <a:t>Now field by field.</a:t>
+              <a:t>Field by field now.</a:t>
             </a:r>
           </a:p>
           <a:p/>
           <a:p>
             <a:r>
-              <a:t>On 23 August, eight days before the first model results were recorded, I wrote down a</a:t>
-            </a:r>
-          </a:p>
-          <a:p>
-            <a:r>
-              <a:t>prediction and committed it to the repository. [point to the box] The language models should beat the rules by</a:t>
-            </a:r>
-          </a:p>
-          <a:p>
-            <a:r>
-              <a:t>the most on the metal precursor, the linker and the synthesis method, and by the least on</a:t>
-            </a:r>
-          </a:p>
-          <a:p>
-            <a:r>
-              <a:t>conditions and solvents. My reasoning was that working out which material is being made needs</a:t>
-            </a:r>
-          </a:p>
-          <a:p>
-            <a:r>
-              <a:t>reading comprehension, whereas a temperature or a solvent name is a simple pattern.</a:t>
+              <a:t>Back in August, before I ran a single model, I wrote down a prediction and committed it.</a:t>
+            </a:r>
+          </a:p>
+          <a:p>
+            <a:r>
+              <a:t>[point to the box] The models should beat the rules by the most on the precursor, the linker and</a:t>
+            </a:r>
+          </a:p>
+          <a:p>
+            <a:r>
+              <a:t>the method, and by the least on conditions and solvents. My thinking was that working out which</a:t>
+            </a:r>
+          </a:p>
+          <a:p>
+            <a:r>
+              <a:t>material is being made takes real reading, whereas a temperature is just a pattern.</a:t>
             </a:r>
           </a:p>
           <a:p/>
           <a:p>
             <a:r>
-              <a:t>One of those three, the synthesis method, has only a single triple in my gold standard, so it</a:t>
-            </a:r>
-          </a:p>
-          <a:p>
-            <a:r>
-              <a:t>cannot be tested either way. On the four fields that can be tested, the margins were plus 0.42,</a:t>
-            </a:r>
-          </a:p>
-          <a:p>
-            <a:r>
-              <a:t>0.31, 0.25 and 0.17. Precursor and linker lead, solvent and condition trail, as predicted. And</a:t>
-            </a:r>
-          </a:p>
-          <a:p>
-            <a:r>
-              <a:t>because it was written down first, that part is a genuine confirmation.</a:t>
-            </a:r>
-          </a:p>
-          <a:p/>
-          <a:p>
-            <a:r>
-              <a:t>One caveat. The condition scores are low for every system, because I annotated conditions as one</a:t>
-            </a:r>
-          </a:p>
-          <a:p>
-            <a:r>
-              <a:t>combined string, while the models split them into separate parts. So that field measures</a:t>
-            </a:r>
-          </a:p>
-          <a:p>
-            <a:r>
-              <a:t>annotation style rather than accuracy, and I leave it out of my conclusions. Without it, the best</a:t>
-            </a:r>
-          </a:p>
-          <a:p>
-            <a:r>
-              <a:t>configuration averages about 0.53.</a:t>
+              <a:t>One of those three, the method, has only a single triple in my gold standard, so I can't test it</a:t>
+            </a:r>
+          </a:p>
+          <a:p>
+            <a:r>
+              <a:t>either way. On the four I can test, the margins came out plus 0.42, 0.31, 0.25 and 0.17.</a:t>
+            </a:r>
+          </a:p>
+          <a:p>
+            <a:r>
+              <a:t>Precursor and linker lead, solvent and condition trail. That's what I predicted, and it was</a:t>
+            </a:r>
+          </a:p>
+          <a:p>
+            <a:r>
+              <a:t>timestamped before I ran anything.</a:t>
             </a:r>
           </a:p>
         </p:txBody>
@@ -2082,92 +1921,66 @@
           <a:lstStyle/>
           <a:p>
             <a:r>
-              <a:t>Time: 1:45</a:t>
-            </a:r>
-          </a:p>
-          <a:p>
-            <a:r>
-              <a:t>Remember: gpt-4o extracts less. Measured. Why, not yet.</a:t>
+              <a:t>Time: 1:20</a:t>
+            </a:r>
+          </a:p>
+          <a:p>
+            <a:r>
+              <a:t>Remember: gpt-4o extracts less. That's measured. Why, I don't know yet.</a:t>
             </a:r>
           </a:p>
           <a:p/>
           <a:p>
             <a:r>
-              <a:t>This is the result I think matters most. The cheap model beat the expensive one.</a:t>
+              <a:t>This is the result I care about most. The cheap model beat the expensive one. 0.364 for under</a:t>
+            </a:r>
+          </a:p>
+          <a:p>
+            <a:r>
+              <a:t>three cents, against 0.245 for a dollar twenty-nine.</a:t>
             </a:r>
           </a:p>
           <a:p/>
           <a:p>
             <a:r>
-              <a:t>[point to the numbers] gpt-4o-mini with schema-guided prompting scored 0.364, for under three</a:t>
-            </a:r>
-          </a:p>
-          <a:p>
-            <a:r>
-              <a:t>cents. gpt-4o with few-shot prompting cost 1.29 dollars and scored 0.245. That is a 47 times</a:t>
-            </a:r>
-          </a:p>
-          <a:p>
-            <a:r>
-              <a:t>cost difference, in favour of the weaker model.</a:t>
+              <a:t>My first explanation was that the bigger model writes more, and the extra turns into wrong</a:t>
+            </a:r>
+          </a:p>
+          <a:p>
+            <a:r>
+              <a:t>answers. I could test that for free, because I'd saved every output. So I counted.</a:t>
             </a:r>
           </a:p>
           <a:p/>
           <a:p>
             <a:r>
-              <a:t>My first explanation was that the bigger model writes more, and the extra output turns into</a:t>
-            </a:r>
-          </a:p>
-          <a:p>
-            <a:r>
-              <a:t>false positives. But that is a claim I could test for free, because every output was saved. So</a:t>
-            </a:r>
-          </a:p>
-          <a:p>
-            <a:r>
-              <a:t>I counted.</a:t>
+              <a:t>I was wrong, and backwards. gpt-4o produces fewer facts than the mini, in all four strategies.</a:t>
+            </a:r>
+          </a:p>
+          <a:p>
+            <a:r>
+              <a:t>It isn't a precision problem, it's recall. On the best strategy gpt-4o finds 39 of the 138, and</a:t>
+            </a:r>
+          </a:p>
+          <a:p>
+            <a:r>
+              <a:t>the mini finds 61.</a:t>
             </a:r>
           </a:p>
           <a:p/>
           <a:p>
             <a:r>
-              <a:t>It was wrong, and wrong in the opposite direction. gpt-4o produces fewer triples than</a:t>
-            </a:r>
-          </a:p>
-          <a:p>
-            <a:r>
-              <a:t>gpt-4o-mini in all four strategies. The gap is not precision, it is recall. On schema-guided,</a:t>
-            </a:r>
-          </a:p>
-          <a:p>
-            <a:r>
-              <a:t>gpt-4o finds 39 of the 138 correct facts, gpt-4o-mini finds 61, and precision is almost the</a:t>
-            </a:r>
-          </a:p>
-          <a:p>
-            <a:r>
-              <a:t>same.</a:t>
-            </a:r>
-          </a:p>
-          <a:p/>
-          <a:p>
-            <a:r>
-              <a:t>So the larger model extracts less. But I have to be honest about one thing. Every one of my</a:t>
-            </a:r>
-          </a:p>
-          <a:p>
-            <a:r>
-              <a:t>prompts tells the model to leave a fact out if it is unsure. So gpt-4o might be more cautious</a:t>
-            </a:r>
-          </a:p>
-          <a:p>
-            <a:r>
-              <a:t>by nature, or it might simply follow my instruction more faithfully. My design cannot tell those</a:t>
-            </a:r>
-          </a:p>
-          <a:p>
-            <a:r>
-              <a:t>two apart. The fix is simple: run both models again without that line.</a:t>
+              <a:t>So gpt-4o extracts less. But I have to be honest about one thing. Every one of my prompts tells</a:t>
+            </a:r>
+          </a:p>
+          <a:p>
+            <a:r>
+              <a:t>the model to leave a fact out when it's unsure. So maybe gpt-4o is more cautious, or maybe it</a:t>
+            </a:r>
+          </a:p>
+          <a:p>
+            <a:r>
+              <a:t>just follows my instruction better. My setup can't separate those two.</a:t>
             </a:r>
           </a:p>
         </p:txBody>
